--- a/docs/pptx/whole/ritu-linsubhr-ratio-anemia2.pptx
+++ b/docs/pptx/whole/ritu-linsubhr-ratio-anemia2.pptx
@@ -2443,7 +2443,7 @@
           </p:nvSpPr>
           <p:spPr>
             <a:xfrm>
-              <a:off x="1424129" y="2073503"/>
+              <a:off x="1425728" y="2073503"/>
               <a:ext cx="0" cy="3649639"/>
             </a:xfrm>
             <a:custGeom>
@@ -2486,7 +2486,7 @@
           </p:nvSpPr>
           <p:spPr>
             <a:xfrm>
-              <a:off x="3298684" y="2073503"/>
+              <a:off x="3298283" y="2073503"/>
               <a:ext cx="0" cy="3649639"/>
             </a:xfrm>
             <a:custGeom>
@@ -2529,7 +2529,7 @@
           </p:nvSpPr>
           <p:spPr>
             <a:xfrm>
-              <a:off x="5173239" y="2073503"/>
+              <a:off x="5170839" y="2073503"/>
               <a:ext cx="0" cy="3649639"/>
             </a:xfrm>
             <a:custGeom>
@@ -2572,7 +2572,7 @@
           </p:nvSpPr>
           <p:spPr>
             <a:xfrm>
-              <a:off x="7047795" y="2073503"/>
+              <a:off x="7043395" y="2073503"/>
               <a:ext cx="0" cy="3649639"/>
             </a:xfrm>
             <a:custGeom>
@@ -2830,7 +2830,7 @@
           </p:nvSpPr>
           <p:spPr>
             <a:xfrm>
-              <a:off x="2361407" y="2073503"/>
+              <a:off x="2362006" y="2073503"/>
               <a:ext cx="0" cy="3649639"/>
             </a:xfrm>
             <a:custGeom>
@@ -2873,7 +2873,7 @@
           </p:nvSpPr>
           <p:spPr>
             <a:xfrm>
-              <a:off x="4235962" y="2073503"/>
+              <a:off x="4234561" y="2073503"/>
               <a:ext cx="0" cy="3649639"/>
             </a:xfrm>
             <a:custGeom>
@@ -2916,7 +2916,7 @@
           </p:nvSpPr>
           <p:spPr>
             <a:xfrm>
-              <a:off x="6110517" y="2073503"/>
+              <a:off x="6107117" y="2073503"/>
               <a:ext cx="0" cy="3649639"/>
             </a:xfrm>
             <a:custGeom>
@@ -2959,7 +2959,7 @@
           </p:nvSpPr>
           <p:spPr>
             <a:xfrm>
-              <a:off x="7985072" y="2073503"/>
+              <a:off x="7979673" y="2073503"/>
               <a:ext cx="0" cy="3649639"/>
             </a:xfrm>
             <a:custGeom>
@@ -3002,612 +3002,612 @@
           </p:nvSpPr>
           <p:spPr>
             <a:xfrm>
-              <a:off x="1172049" y="2493804"/>
-              <a:ext cx="7090630" cy="2902915"/>
+              <a:off x="1172049" y="2474897"/>
+              <a:ext cx="7090630" cy="2923021"/>
             </a:xfrm>
             <a:custGeom>
               <a:avLst/>
               <a:pathLst>
-                <a:path w="7090630" h="2902915">
+                <a:path w="7090630" h="2923021">
                   <a:moveTo>
                     <a:pt x="0" y="0"/>
                   </a:moveTo>
                   <a:lnTo>
-                    <a:pt x="71622" y="89902"/>
-                  </a:lnTo>
-                  <a:lnTo>
-                    <a:pt x="143245" y="177166"/>
-                  </a:lnTo>
-                  <a:lnTo>
-                    <a:pt x="214867" y="261868"/>
-                  </a:lnTo>
-                  <a:lnTo>
-                    <a:pt x="286490" y="344086"/>
-                  </a:lnTo>
-                  <a:lnTo>
-                    <a:pt x="358112" y="423890"/>
-                  </a:lnTo>
-                  <a:lnTo>
-                    <a:pt x="429735" y="501352"/>
-                  </a:lnTo>
-                  <a:lnTo>
-                    <a:pt x="501357" y="576541"/>
-                  </a:lnTo>
-                  <a:lnTo>
-                    <a:pt x="572980" y="649524"/>
-                  </a:lnTo>
-                  <a:lnTo>
-                    <a:pt x="644602" y="720365"/>
-                  </a:lnTo>
-                  <a:lnTo>
-                    <a:pt x="716225" y="789127"/>
-                  </a:lnTo>
-                  <a:lnTo>
-                    <a:pt x="787847" y="855870"/>
-                  </a:lnTo>
-                  <a:lnTo>
-                    <a:pt x="859470" y="920656"/>
-                  </a:lnTo>
-                  <a:lnTo>
-                    <a:pt x="931092" y="983540"/>
-                  </a:lnTo>
-                  <a:lnTo>
-                    <a:pt x="1002715" y="1044578"/>
-                  </a:lnTo>
-                  <a:lnTo>
-                    <a:pt x="1074337" y="1103825"/>
-                  </a:lnTo>
-                  <a:lnTo>
-                    <a:pt x="1145960" y="1161334"/>
-                  </a:lnTo>
-                  <a:lnTo>
-                    <a:pt x="1217582" y="1217154"/>
-                  </a:lnTo>
-                  <a:lnTo>
-                    <a:pt x="1289205" y="1271337"/>
-                  </a:lnTo>
-                  <a:lnTo>
-                    <a:pt x="1360827" y="1323930"/>
-                  </a:lnTo>
-                  <a:lnTo>
-                    <a:pt x="1432450" y="1374979"/>
-                  </a:lnTo>
-                  <a:lnTo>
-                    <a:pt x="1504073" y="1424530"/>
-                  </a:lnTo>
-                  <a:lnTo>
-                    <a:pt x="1575695" y="1472627"/>
-                  </a:lnTo>
-                  <a:lnTo>
-                    <a:pt x="1647318" y="1519312"/>
-                  </a:lnTo>
-                  <a:lnTo>
-                    <a:pt x="1718940" y="1564627"/>
-                  </a:lnTo>
-                  <a:lnTo>
-                    <a:pt x="1790563" y="1608613"/>
-                  </a:lnTo>
-                  <a:lnTo>
-                    <a:pt x="1862185" y="1651307"/>
-                  </a:lnTo>
-                  <a:lnTo>
-                    <a:pt x="1933808" y="1692749"/>
-                  </a:lnTo>
-                  <a:lnTo>
-                    <a:pt x="2005430" y="1732974"/>
-                  </a:lnTo>
-                  <a:lnTo>
-                    <a:pt x="2077053" y="1772019"/>
-                  </a:lnTo>
-                  <a:lnTo>
-                    <a:pt x="2148675" y="1809919"/>
-                  </a:lnTo>
-                  <a:lnTo>
-                    <a:pt x="2220298" y="1846706"/>
-                  </a:lnTo>
-                  <a:lnTo>
-                    <a:pt x="2291920" y="1882413"/>
-                  </a:lnTo>
-                  <a:lnTo>
-                    <a:pt x="2363543" y="1917072"/>
-                  </a:lnTo>
-                  <a:lnTo>
-                    <a:pt x="2435165" y="1950715"/>
-                  </a:lnTo>
-                  <a:lnTo>
-                    <a:pt x="2506788" y="1983370"/>
-                  </a:lnTo>
-                  <a:lnTo>
-                    <a:pt x="2578410" y="2015066"/>
-                  </a:lnTo>
-                  <a:lnTo>
-                    <a:pt x="2650033" y="2045833"/>
-                  </a:lnTo>
-                  <a:lnTo>
-                    <a:pt x="2721655" y="2075697"/>
-                  </a:lnTo>
-                  <a:lnTo>
-                    <a:pt x="2793278" y="2104684"/>
-                  </a:lnTo>
-                  <a:lnTo>
-                    <a:pt x="2864901" y="2132820"/>
-                  </a:lnTo>
-                  <a:lnTo>
-                    <a:pt x="2936523" y="2160131"/>
-                  </a:lnTo>
-                  <a:lnTo>
-                    <a:pt x="3008146" y="2186640"/>
-                  </a:lnTo>
-                  <a:lnTo>
-                    <a:pt x="3079768" y="2212372"/>
-                  </a:lnTo>
-                  <a:lnTo>
-                    <a:pt x="3151391" y="2234813"/>
-                  </a:lnTo>
-                  <a:lnTo>
-                    <a:pt x="3223013" y="2240872"/>
-                  </a:lnTo>
-                  <a:lnTo>
-                    <a:pt x="3294636" y="2246887"/>
-                  </a:lnTo>
-                  <a:lnTo>
-                    <a:pt x="3366258" y="2252859"/>
-                  </a:lnTo>
-                  <a:lnTo>
-                    <a:pt x="3437881" y="2258786"/>
-                  </a:lnTo>
-                  <a:lnTo>
-                    <a:pt x="3509503" y="2264671"/>
-                  </a:lnTo>
-                  <a:lnTo>
-                    <a:pt x="3581126" y="2270512"/>
-                  </a:lnTo>
-                  <a:lnTo>
-                    <a:pt x="3652748" y="2276310"/>
-                  </a:lnTo>
-                  <a:lnTo>
-                    <a:pt x="3724371" y="2282066"/>
-                  </a:lnTo>
-                  <a:lnTo>
-                    <a:pt x="3795993" y="2287780"/>
-                  </a:lnTo>
-                  <a:lnTo>
-                    <a:pt x="3867616" y="2293453"/>
-                  </a:lnTo>
-                  <a:lnTo>
-                    <a:pt x="3939238" y="2299083"/>
-                  </a:lnTo>
-                  <a:lnTo>
-                    <a:pt x="4010861" y="2304673"/>
-                  </a:lnTo>
-                  <a:lnTo>
-                    <a:pt x="4082483" y="2310222"/>
-                  </a:lnTo>
-                  <a:lnTo>
-                    <a:pt x="4154106" y="2315730"/>
-                  </a:lnTo>
-                  <a:lnTo>
-                    <a:pt x="4225729" y="2321198"/>
-                  </a:lnTo>
-                  <a:lnTo>
-                    <a:pt x="4297351" y="2326626"/>
-                  </a:lnTo>
-                  <a:lnTo>
-                    <a:pt x="4368974" y="2332014"/>
-                  </a:lnTo>
-                  <a:lnTo>
-                    <a:pt x="4440596" y="2337362"/>
-                  </a:lnTo>
-                  <a:lnTo>
-                    <a:pt x="4512219" y="2342672"/>
-                  </a:lnTo>
-                  <a:lnTo>
-                    <a:pt x="4583841" y="2347943"/>
-                  </a:lnTo>
-                  <a:lnTo>
-                    <a:pt x="4655464" y="2353175"/>
-                  </a:lnTo>
-                  <a:lnTo>
-                    <a:pt x="4727086" y="2358369"/>
-                  </a:lnTo>
-                  <a:lnTo>
-                    <a:pt x="4798709" y="2363525"/>
-                  </a:lnTo>
-                  <a:lnTo>
-                    <a:pt x="4870331" y="2368644"/>
-                  </a:lnTo>
-                  <a:lnTo>
-                    <a:pt x="4941954" y="2373725"/>
-                  </a:lnTo>
-                  <a:lnTo>
-                    <a:pt x="5013576" y="2378768"/>
-                  </a:lnTo>
-                  <a:lnTo>
-                    <a:pt x="5085199" y="2383775"/>
-                  </a:lnTo>
-                  <a:lnTo>
-                    <a:pt x="5156821" y="2388745"/>
-                  </a:lnTo>
-                  <a:lnTo>
-                    <a:pt x="5228444" y="2393679"/>
-                  </a:lnTo>
-                  <a:lnTo>
-                    <a:pt x="5300066" y="2398577"/>
-                  </a:lnTo>
-                  <a:lnTo>
-                    <a:pt x="5371689" y="2403439"/>
-                  </a:lnTo>
-                  <a:lnTo>
-                    <a:pt x="5443311" y="2408266"/>
-                  </a:lnTo>
-                  <a:lnTo>
-                    <a:pt x="5514934" y="2413057"/>
-                  </a:lnTo>
-                  <a:lnTo>
-                    <a:pt x="5586557" y="2417813"/>
-                  </a:lnTo>
-                  <a:lnTo>
-                    <a:pt x="5658179" y="2422534"/>
-                  </a:lnTo>
-                  <a:lnTo>
-                    <a:pt x="5729802" y="2427221"/>
-                  </a:lnTo>
-                  <a:lnTo>
-                    <a:pt x="5801424" y="2431874"/>
-                  </a:lnTo>
-                  <a:lnTo>
-                    <a:pt x="5873047" y="2436492"/>
-                  </a:lnTo>
-                  <a:lnTo>
-                    <a:pt x="5944669" y="2441077"/>
-                  </a:lnTo>
-                  <a:lnTo>
-                    <a:pt x="6016292" y="2445628"/>
-                  </a:lnTo>
-                  <a:lnTo>
-                    <a:pt x="6087914" y="2450146"/>
-                  </a:lnTo>
-                  <a:lnTo>
-                    <a:pt x="6159537" y="2454631"/>
-                  </a:lnTo>
-                  <a:lnTo>
-                    <a:pt x="6231159" y="2459083"/>
-                  </a:lnTo>
-                  <a:lnTo>
-                    <a:pt x="6302782" y="2463503"/>
-                  </a:lnTo>
-                  <a:lnTo>
-                    <a:pt x="6374404" y="2467890"/>
-                  </a:lnTo>
-                  <a:lnTo>
-                    <a:pt x="6446027" y="2472245"/>
-                  </a:lnTo>
-                  <a:lnTo>
-                    <a:pt x="6517649" y="2476568"/>
-                  </a:lnTo>
-                  <a:lnTo>
-                    <a:pt x="6589272" y="2480860"/>
-                  </a:lnTo>
-                  <a:lnTo>
-                    <a:pt x="6660894" y="2485120"/>
-                  </a:lnTo>
-                  <a:lnTo>
-                    <a:pt x="6732517" y="2489349"/>
-                  </a:lnTo>
-                  <a:lnTo>
-                    <a:pt x="6804139" y="2493548"/>
-                  </a:lnTo>
-                  <a:lnTo>
-                    <a:pt x="6875762" y="2497715"/>
-                  </a:lnTo>
-                  <a:lnTo>
-                    <a:pt x="6947385" y="2501852"/>
-                  </a:lnTo>
-                  <a:lnTo>
-                    <a:pt x="7019007" y="2505959"/>
-                  </a:lnTo>
-                  <a:lnTo>
-                    <a:pt x="7090630" y="2510036"/>
-                  </a:lnTo>
-                  <a:lnTo>
-                    <a:pt x="7090630" y="2902915"/>
-                  </a:lnTo>
-                  <a:lnTo>
-                    <a:pt x="7019007" y="2898061"/>
-                  </a:lnTo>
-                  <a:lnTo>
-                    <a:pt x="6947385" y="2893061"/>
-                  </a:lnTo>
-                  <a:lnTo>
-                    <a:pt x="6875762" y="2887910"/>
-                  </a:lnTo>
-                  <a:lnTo>
-                    <a:pt x="6804139" y="2882603"/>
-                  </a:lnTo>
-                  <a:lnTo>
-                    <a:pt x="6732517" y="2877135"/>
-                  </a:lnTo>
-                  <a:lnTo>
-                    <a:pt x="6660894" y="2871502"/>
-                  </a:lnTo>
-                  <a:lnTo>
-                    <a:pt x="6589272" y="2865699"/>
-                  </a:lnTo>
-                  <a:lnTo>
-                    <a:pt x="6517649" y="2859720"/>
-                  </a:lnTo>
-                  <a:lnTo>
-                    <a:pt x="6446027" y="2853561"/>
-                  </a:lnTo>
-                  <a:lnTo>
-                    <a:pt x="6374404" y="2847215"/>
-                  </a:lnTo>
-                  <a:lnTo>
-                    <a:pt x="6302782" y="2840678"/>
-                  </a:lnTo>
-                  <a:lnTo>
-                    <a:pt x="6231159" y="2833943"/>
-                  </a:lnTo>
-                  <a:lnTo>
-                    <a:pt x="6159537" y="2827004"/>
-                  </a:lnTo>
-                  <a:lnTo>
-                    <a:pt x="6087914" y="2819855"/>
-                  </a:lnTo>
-                  <a:lnTo>
-                    <a:pt x="6016292" y="2812490"/>
-                  </a:lnTo>
-                  <a:lnTo>
-                    <a:pt x="5944669" y="2804903"/>
-                  </a:lnTo>
-                  <a:lnTo>
-                    <a:pt x="5873047" y="2797086"/>
-                  </a:lnTo>
-                  <a:lnTo>
-                    <a:pt x="5801424" y="2789033"/>
-                  </a:lnTo>
-                  <a:lnTo>
-                    <a:pt x="5729802" y="2780737"/>
-                  </a:lnTo>
-                  <a:lnTo>
-                    <a:pt x="5658179" y="2772189"/>
-                  </a:lnTo>
-                  <a:lnTo>
-                    <a:pt x="5586557" y="2763383"/>
-                  </a:lnTo>
-                  <a:lnTo>
-                    <a:pt x="5514934" y="2754311"/>
-                  </a:lnTo>
-                  <a:lnTo>
-                    <a:pt x="5443311" y="2744965"/>
-                  </a:lnTo>
-                  <a:lnTo>
-                    <a:pt x="5371689" y="2735336"/>
-                  </a:lnTo>
-                  <a:lnTo>
-                    <a:pt x="5300066" y="2725416"/>
-                  </a:lnTo>
-                  <a:lnTo>
-                    <a:pt x="5228444" y="2715196"/>
-                  </a:lnTo>
-                  <a:lnTo>
-                    <a:pt x="5156821" y="2704667"/>
-                  </a:lnTo>
-                  <a:lnTo>
-                    <a:pt x="5085199" y="2693820"/>
-                  </a:lnTo>
-                  <a:lnTo>
-                    <a:pt x="5013576" y="2682644"/>
-                  </a:lnTo>
-                  <a:lnTo>
-                    <a:pt x="4941954" y="2671131"/>
-                  </a:lnTo>
-                  <a:lnTo>
-                    <a:pt x="4870331" y="2659270"/>
-                  </a:lnTo>
-                  <a:lnTo>
-                    <a:pt x="4798709" y="2647050"/>
-                  </a:lnTo>
-                  <a:lnTo>
-                    <a:pt x="4727086" y="2634461"/>
-                  </a:lnTo>
-                  <a:lnTo>
-                    <a:pt x="4655464" y="2621491"/>
-                  </a:lnTo>
-                  <a:lnTo>
-                    <a:pt x="4583841" y="2608129"/>
-                  </a:lnTo>
-                  <a:lnTo>
-                    <a:pt x="4512219" y="2594363"/>
-                  </a:lnTo>
-                  <a:lnTo>
-                    <a:pt x="4440596" y="2580181"/>
-                  </a:lnTo>
-                  <a:lnTo>
-                    <a:pt x="4368974" y="2565569"/>
-                  </a:lnTo>
-                  <a:lnTo>
-                    <a:pt x="4297351" y="2550517"/>
-                  </a:lnTo>
-                  <a:lnTo>
-                    <a:pt x="4225729" y="2535009"/>
-                  </a:lnTo>
-                  <a:lnTo>
-                    <a:pt x="4154106" y="2519032"/>
-                  </a:lnTo>
-                  <a:lnTo>
-                    <a:pt x="4082483" y="2502572"/>
-                  </a:lnTo>
-                  <a:lnTo>
-                    <a:pt x="4010861" y="2485615"/>
-                  </a:lnTo>
-                  <a:lnTo>
-                    <a:pt x="3939238" y="2468145"/>
-                  </a:lnTo>
-                  <a:lnTo>
-                    <a:pt x="3867616" y="2450146"/>
-                  </a:lnTo>
-                  <a:lnTo>
-                    <a:pt x="3795993" y="2431604"/>
-                  </a:lnTo>
-                  <a:lnTo>
-                    <a:pt x="3724371" y="2412501"/>
-                  </a:lnTo>
-                  <a:lnTo>
-                    <a:pt x="3652748" y="2392820"/>
-                  </a:lnTo>
-                  <a:lnTo>
-                    <a:pt x="3581126" y="2372544"/>
-                  </a:lnTo>
-                  <a:lnTo>
-                    <a:pt x="3509503" y="2351656"/>
-                  </a:lnTo>
-                  <a:lnTo>
-                    <a:pt x="3437881" y="2330135"/>
-                  </a:lnTo>
-                  <a:lnTo>
-                    <a:pt x="3366258" y="2307964"/>
-                  </a:lnTo>
-                  <a:lnTo>
-                    <a:pt x="3294636" y="2285123"/>
-                  </a:lnTo>
-                  <a:lnTo>
-                    <a:pt x="3223013" y="2261591"/>
-                  </a:lnTo>
-                  <a:lnTo>
-                    <a:pt x="3151391" y="2237348"/>
-                  </a:lnTo>
-                  <a:lnTo>
-                    <a:pt x="3079768" y="2228708"/>
-                  </a:lnTo>
-                  <a:lnTo>
-                    <a:pt x="3008146" y="2222559"/>
-                  </a:lnTo>
-                  <a:lnTo>
-                    <a:pt x="2936523" y="2216365"/>
-                  </a:lnTo>
-                  <a:lnTo>
-                    <a:pt x="2864901" y="2210125"/>
-                  </a:lnTo>
-                  <a:lnTo>
-                    <a:pt x="2793278" y="2203838"/>
-                  </a:lnTo>
-                  <a:lnTo>
-                    <a:pt x="2721655" y="2197506"/>
-                  </a:lnTo>
-                  <a:lnTo>
-                    <a:pt x="2650033" y="2191127"/>
-                  </a:lnTo>
-                  <a:lnTo>
-                    <a:pt x="2578410" y="2184701"/>
-                  </a:lnTo>
-                  <a:lnTo>
-                    <a:pt x="2506788" y="2178228"/>
-                  </a:lnTo>
-                  <a:lnTo>
-                    <a:pt x="2435165" y="2171707"/>
-                  </a:lnTo>
-                  <a:lnTo>
-                    <a:pt x="2363543" y="2165138"/>
-                  </a:lnTo>
-                  <a:lnTo>
-                    <a:pt x="2291920" y="2158520"/>
-                  </a:lnTo>
-                  <a:lnTo>
-                    <a:pt x="2220298" y="2151854"/>
-                  </a:lnTo>
-                  <a:lnTo>
-                    <a:pt x="2148675" y="2145138"/>
-                  </a:lnTo>
-                  <a:lnTo>
-                    <a:pt x="2077053" y="2138374"/>
-                  </a:lnTo>
-                  <a:lnTo>
-                    <a:pt x="2005430" y="2131559"/>
-                  </a:lnTo>
-                  <a:lnTo>
-                    <a:pt x="1933808" y="2124694"/>
-                  </a:lnTo>
-                  <a:lnTo>
-                    <a:pt x="1862185" y="2117779"/>
-                  </a:lnTo>
-                  <a:lnTo>
-                    <a:pt x="1790563" y="2110812"/>
-                  </a:lnTo>
-                  <a:lnTo>
-                    <a:pt x="1718940" y="2103795"/>
-                  </a:lnTo>
-                  <a:lnTo>
-                    <a:pt x="1647318" y="2096725"/>
-                  </a:lnTo>
-                  <a:lnTo>
-                    <a:pt x="1575695" y="2089604"/>
-                  </a:lnTo>
-                  <a:lnTo>
-                    <a:pt x="1504073" y="2082430"/>
-                  </a:lnTo>
-                  <a:lnTo>
-                    <a:pt x="1432450" y="2075203"/>
-                  </a:lnTo>
-                  <a:lnTo>
-                    <a:pt x="1360827" y="2067923"/>
-                  </a:lnTo>
-                  <a:lnTo>
-                    <a:pt x="1289205" y="2060590"/>
-                  </a:lnTo>
-                  <a:lnTo>
-                    <a:pt x="1217582" y="2053202"/>
-                  </a:lnTo>
-                  <a:lnTo>
-                    <a:pt x="1145960" y="2045760"/>
-                  </a:lnTo>
-                  <a:lnTo>
-                    <a:pt x="1074337" y="2038263"/>
-                  </a:lnTo>
-                  <a:lnTo>
-                    <a:pt x="1002715" y="2030711"/>
-                  </a:lnTo>
-                  <a:lnTo>
-                    <a:pt x="931092" y="2023103"/>
-                  </a:lnTo>
-                  <a:lnTo>
-                    <a:pt x="859470" y="2015439"/>
-                  </a:lnTo>
-                  <a:lnTo>
-                    <a:pt x="787847" y="2007719"/>
-                  </a:lnTo>
-                  <a:lnTo>
-                    <a:pt x="716225" y="1999942"/>
-                  </a:lnTo>
-                  <a:lnTo>
-                    <a:pt x="644602" y="1992108"/>
-                  </a:lnTo>
-                  <a:lnTo>
-                    <a:pt x="572980" y="1984215"/>
-                  </a:lnTo>
-                  <a:lnTo>
-                    <a:pt x="501357" y="1976265"/>
-                  </a:lnTo>
-                  <a:lnTo>
-                    <a:pt x="429735" y="1968256"/>
-                  </a:lnTo>
-                  <a:lnTo>
-                    <a:pt x="358112" y="1960189"/>
-                  </a:lnTo>
-                  <a:lnTo>
-                    <a:pt x="286490" y="1952061"/>
-                  </a:lnTo>
-                  <a:lnTo>
-                    <a:pt x="214867" y="1943874"/>
-                  </a:lnTo>
-                  <a:lnTo>
-                    <a:pt x="143245" y="1935627"/>
-                  </a:lnTo>
-                  <a:lnTo>
-                    <a:pt x="71622" y="1927318"/>
-                  </a:lnTo>
-                  <a:lnTo>
-                    <a:pt x="0" y="1918949"/>
+                    <a:pt x="71622" y="90869"/>
+                  </a:lnTo>
+                  <a:lnTo>
+                    <a:pt x="143245" y="179060"/>
+                  </a:lnTo>
+                  <a:lnTo>
+                    <a:pt x="214867" y="264650"/>
+                  </a:lnTo>
+                  <a:lnTo>
+                    <a:pt x="286490" y="347718"/>
+                  </a:lnTo>
+                  <a:lnTo>
+                    <a:pt x="358112" y="428336"/>
+                  </a:lnTo>
+                  <a:lnTo>
+                    <a:pt x="429735" y="506578"/>
+                  </a:lnTo>
+                  <a:lnTo>
+                    <a:pt x="501357" y="582513"/>
+                  </a:lnTo>
+                  <a:lnTo>
+                    <a:pt x="572980" y="656210"/>
+                  </a:lnTo>
+                  <a:lnTo>
+                    <a:pt x="644602" y="727734"/>
+                  </a:lnTo>
+                  <a:lnTo>
+                    <a:pt x="716225" y="797150"/>
+                  </a:lnTo>
+                  <a:lnTo>
+                    <a:pt x="787847" y="864519"/>
+                  </a:lnTo>
+                  <a:lnTo>
+                    <a:pt x="859470" y="929902"/>
+                  </a:lnTo>
+                  <a:lnTo>
+                    <a:pt x="931092" y="993357"/>
+                  </a:lnTo>
+                  <a:lnTo>
+                    <a:pt x="1002715" y="1054942"/>
+                  </a:lnTo>
+                  <a:lnTo>
+                    <a:pt x="1074337" y="1114711"/>
+                  </a:lnTo>
+                  <a:lnTo>
+                    <a:pt x="1145960" y="1172718"/>
+                  </a:lnTo>
+                  <a:lnTo>
+                    <a:pt x="1217582" y="1229015"/>
+                  </a:lnTo>
+                  <a:lnTo>
+                    <a:pt x="1289205" y="1283653"/>
+                  </a:lnTo>
+                  <a:lnTo>
+                    <a:pt x="1360827" y="1336679"/>
+                  </a:lnTo>
+                  <a:lnTo>
+                    <a:pt x="1432450" y="1388143"/>
+                  </a:lnTo>
+                  <a:lnTo>
+                    <a:pt x="1504073" y="1438089"/>
+                  </a:lnTo>
+                  <a:lnTo>
+                    <a:pt x="1575695" y="1486563"/>
+                  </a:lnTo>
+                  <a:lnTo>
+                    <a:pt x="1647318" y="1533608"/>
+                  </a:lnTo>
+                  <a:lnTo>
+                    <a:pt x="1718940" y="1579265"/>
+                  </a:lnTo>
+                  <a:lnTo>
+                    <a:pt x="1790563" y="1623577"/>
+                  </a:lnTo>
+                  <a:lnTo>
+                    <a:pt x="1862185" y="1666583"/>
+                  </a:lnTo>
+                  <a:lnTo>
+                    <a:pt x="1933808" y="1708320"/>
+                  </a:lnTo>
+                  <a:lnTo>
+                    <a:pt x="2005430" y="1748828"/>
+                  </a:lnTo>
+                  <a:lnTo>
+                    <a:pt x="2077053" y="1788141"/>
+                  </a:lnTo>
+                  <a:lnTo>
+                    <a:pt x="2148675" y="1826295"/>
+                  </a:lnTo>
+                  <a:lnTo>
+                    <a:pt x="2220298" y="1863324"/>
+                  </a:lnTo>
+                  <a:lnTo>
+                    <a:pt x="2291920" y="1899262"/>
+                  </a:lnTo>
+                  <a:lnTo>
+                    <a:pt x="2363543" y="1934140"/>
+                  </a:lnTo>
+                  <a:lnTo>
+                    <a:pt x="2435165" y="1967990"/>
+                  </a:lnTo>
+                  <a:lnTo>
+                    <a:pt x="2506788" y="2000842"/>
+                  </a:lnTo>
+                  <a:lnTo>
+                    <a:pt x="2578410" y="2032725"/>
+                  </a:lnTo>
+                  <a:lnTo>
+                    <a:pt x="2650033" y="2063669"/>
+                  </a:lnTo>
+                  <a:lnTo>
+                    <a:pt x="2721655" y="2093700"/>
+                  </a:lnTo>
+                  <a:lnTo>
+                    <a:pt x="2793278" y="2122846"/>
+                  </a:lnTo>
+                  <a:lnTo>
+                    <a:pt x="2864901" y="2151133"/>
+                  </a:lnTo>
+                  <a:lnTo>
+                    <a:pt x="2936523" y="2178586"/>
+                  </a:lnTo>
+                  <a:lnTo>
+                    <a:pt x="3008146" y="2205230"/>
+                  </a:lnTo>
+                  <a:lnTo>
+                    <a:pt x="3079768" y="2231088"/>
+                  </a:lnTo>
+                  <a:lnTo>
+                    <a:pt x="3151391" y="2253700"/>
+                  </a:lnTo>
+                  <a:lnTo>
+                    <a:pt x="3223013" y="2259770"/>
+                  </a:lnTo>
+                  <a:lnTo>
+                    <a:pt x="3294636" y="2265796"/>
+                  </a:lnTo>
+                  <a:lnTo>
+                    <a:pt x="3366258" y="2271777"/>
+                  </a:lnTo>
+                  <a:lnTo>
+                    <a:pt x="3437881" y="2277715"/>
+                  </a:lnTo>
+                  <a:lnTo>
+                    <a:pt x="3509503" y="2283610"/>
+                  </a:lnTo>
+                  <a:lnTo>
+                    <a:pt x="3581126" y="2289461"/>
+                  </a:lnTo>
+                  <a:lnTo>
+                    <a:pt x="3652748" y="2295269"/>
+                  </a:lnTo>
+                  <a:lnTo>
+                    <a:pt x="3724371" y="2301035"/>
+                  </a:lnTo>
+                  <a:lnTo>
+                    <a:pt x="3795993" y="2306759"/>
+                  </a:lnTo>
+                  <a:lnTo>
+                    <a:pt x="3867616" y="2312440"/>
+                  </a:lnTo>
+                  <a:lnTo>
+                    <a:pt x="3939238" y="2318080"/>
+                  </a:lnTo>
+                  <a:lnTo>
+                    <a:pt x="4010861" y="2323679"/>
+                  </a:lnTo>
+                  <a:lnTo>
+                    <a:pt x="4082483" y="2329237"/>
+                  </a:lnTo>
+                  <a:lnTo>
+                    <a:pt x="4154106" y="2334754"/>
+                  </a:lnTo>
+                  <a:lnTo>
+                    <a:pt x="4225729" y="2340230"/>
+                  </a:lnTo>
+                  <a:lnTo>
+                    <a:pt x="4297351" y="2345667"/>
+                  </a:lnTo>
+                  <a:lnTo>
+                    <a:pt x="4368974" y="2351063"/>
+                  </a:lnTo>
+                  <a:lnTo>
+                    <a:pt x="4440596" y="2356421"/>
+                  </a:lnTo>
+                  <a:lnTo>
+                    <a:pt x="4512219" y="2361738"/>
+                  </a:lnTo>
+                  <a:lnTo>
+                    <a:pt x="4583841" y="2367017"/>
+                  </a:lnTo>
+                  <a:lnTo>
+                    <a:pt x="4655464" y="2372258"/>
+                  </a:lnTo>
+                  <a:lnTo>
+                    <a:pt x="4727086" y="2377459"/>
+                  </a:lnTo>
+                  <a:lnTo>
+                    <a:pt x="4798709" y="2382623"/>
+                  </a:lnTo>
+                  <a:lnTo>
+                    <a:pt x="4870331" y="2387749"/>
+                  </a:lnTo>
+                  <a:lnTo>
+                    <a:pt x="4941954" y="2392837"/>
+                  </a:lnTo>
+                  <a:lnTo>
+                    <a:pt x="5013576" y="2397888"/>
+                  </a:lnTo>
+                  <a:lnTo>
+                    <a:pt x="5085199" y="2402903"/>
+                  </a:lnTo>
+                  <a:lnTo>
+                    <a:pt x="5156821" y="2407880"/>
+                  </a:lnTo>
+                  <a:lnTo>
+                    <a:pt x="5228444" y="2412821"/>
+                  </a:lnTo>
+                  <a:lnTo>
+                    <a:pt x="5300066" y="2417725"/>
+                  </a:lnTo>
+                  <a:lnTo>
+                    <a:pt x="5371689" y="2422594"/>
+                  </a:lnTo>
+                  <a:lnTo>
+                    <a:pt x="5443311" y="2427427"/>
+                  </a:lnTo>
+                  <a:lnTo>
+                    <a:pt x="5514934" y="2432225"/>
+                  </a:lnTo>
+                  <a:lnTo>
+                    <a:pt x="5586557" y="2436987"/>
+                  </a:lnTo>
+                  <a:lnTo>
+                    <a:pt x="5658179" y="2441715"/>
+                  </a:lnTo>
+                  <a:lnTo>
+                    <a:pt x="5729802" y="2446408"/>
+                  </a:lnTo>
+                  <a:lnTo>
+                    <a:pt x="5801424" y="2451067"/>
+                  </a:lnTo>
+                  <a:lnTo>
+                    <a:pt x="5873047" y="2455691"/>
+                  </a:lnTo>
+                  <a:lnTo>
+                    <a:pt x="5944669" y="2460282"/>
+                  </a:lnTo>
+                  <a:lnTo>
+                    <a:pt x="6016292" y="2464839"/>
+                  </a:lnTo>
+                  <a:lnTo>
+                    <a:pt x="6087914" y="2469363"/>
+                  </a:lnTo>
+                  <a:lnTo>
+                    <a:pt x="6159537" y="2473853"/>
+                  </a:lnTo>
+                  <a:lnTo>
+                    <a:pt x="6231159" y="2478311"/>
+                  </a:lnTo>
+                  <a:lnTo>
+                    <a:pt x="6302782" y="2482736"/>
+                  </a:lnTo>
+                  <a:lnTo>
+                    <a:pt x="6374404" y="2487128"/>
+                  </a:lnTo>
+                  <a:lnTo>
+                    <a:pt x="6446027" y="2491488"/>
+                  </a:lnTo>
+                  <a:lnTo>
+                    <a:pt x="6517649" y="2495817"/>
+                  </a:lnTo>
+                  <a:lnTo>
+                    <a:pt x="6589272" y="2500114"/>
+                  </a:lnTo>
+                  <a:lnTo>
+                    <a:pt x="6660894" y="2504379"/>
+                  </a:lnTo>
+                  <a:lnTo>
+                    <a:pt x="6732517" y="2508613"/>
+                  </a:lnTo>
+                  <a:lnTo>
+                    <a:pt x="6804139" y="2512816"/>
+                  </a:lnTo>
+                  <a:lnTo>
+                    <a:pt x="6875762" y="2516988"/>
+                  </a:lnTo>
+                  <a:lnTo>
+                    <a:pt x="6947385" y="2521129"/>
+                  </a:lnTo>
+                  <a:lnTo>
+                    <a:pt x="7019007" y="2525241"/>
+                  </a:lnTo>
+                  <a:lnTo>
+                    <a:pt x="7090630" y="2529322"/>
+                  </a:lnTo>
+                  <a:lnTo>
+                    <a:pt x="7090630" y="2923021"/>
+                  </a:lnTo>
+                  <a:lnTo>
+                    <a:pt x="7019007" y="2918181"/>
+                  </a:lnTo>
+                  <a:lnTo>
+                    <a:pt x="6947385" y="2913194"/>
+                  </a:lnTo>
+                  <a:lnTo>
+                    <a:pt x="6875762" y="2908056"/>
+                  </a:lnTo>
+                  <a:lnTo>
+                    <a:pt x="6804139" y="2902761"/>
+                  </a:lnTo>
+                  <a:lnTo>
+                    <a:pt x="6732517" y="2897306"/>
+                  </a:lnTo>
+                  <a:lnTo>
+                    <a:pt x="6660894" y="2891685"/>
+                  </a:lnTo>
+                  <a:lnTo>
+                    <a:pt x="6589272" y="2885893"/>
+                  </a:lnTo>
+                  <a:lnTo>
+                    <a:pt x="6517649" y="2879926"/>
+                  </a:lnTo>
+                  <a:lnTo>
+                    <a:pt x="6446027" y="2873777"/>
+                  </a:lnTo>
+                  <a:lnTo>
+                    <a:pt x="6374404" y="2867441"/>
+                  </a:lnTo>
+                  <a:lnTo>
+                    <a:pt x="6302782" y="2860913"/>
+                  </a:lnTo>
+                  <a:lnTo>
+                    <a:pt x="6231159" y="2854186"/>
+                  </a:lnTo>
+                  <a:lnTo>
+                    <a:pt x="6159537" y="2847255"/>
+                  </a:lnTo>
+                  <a:lnTo>
+                    <a:pt x="6087914" y="2840114"/>
+                  </a:lnTo>
+                  <a:lnTo>
+                    <a:pt x="6016292" y="2832756"/>
+                  </a:lnTo>
+                  <a:lnTo>
+                    <a:pt x="5944669" y="2825174"/>
+                  </a:lnTo>
+                  <a:lnTo>
+                    <a:pt x="5873047" y="2817362"/>
+                  </a:lnTo>
+                  <a:lnTo>
+                    <a:pt x="5801424" y="2809313"/>
+                  </a:lnTo>
+                  <a:lnTo>
+                    <a:pt x="5729802" y="2801019"/>
+                  </a:lnTo>
+                  <a:lnTo>
+                    <a:pt x="5658179" y="2792473"/>
+                  </a:lnTo>
+                  <a:lnTo>
+                    <a:pt x="5586557" y="2783668"/>
+                  </a:lnTo>
+                  <a:lnTo>
+                    <a:pt x="5514934" y="2774595"/>
+                  </a:lnTo>
+                  <a:lnTo>
+                    <a:pt x="5443311" y="2765246"/>
+                  </a:lnTo>
+                  <a:lnTo>
+                    <a:pt x="5371689" y="2755614"/>
+                  </a:lnTo>
+                  <a:lnTo>
+                    <a:pt x="5300066" y="2745689"/>
+                  </a:lnTo>
+                  <a:lnTo>
+                    <a:pt x="5228444" y="2735462"/>
+                  </a:lnTo>
+                  <a:lnTo>
+                    <a:pt x="5156821" y="2724925"/>
+                  </a:lnTo>
+                  <a:lnTo>
+                    <a:pt x="5085199" y="2714068"/>
+                  </a:lnTo>
+                  <a:lnTo>
+                    <a:pt x="5013576" y="2702881"/>
+                  </a:lnTo>
+                  <a:lnTo>
+                    <a:pt x="4941954" y="2691354"/>
+                  </a:lnTo>
+                  <a:lnTo>
+                    <a:pt x="4870331" y="2679477"/>
+                  </a:lnTo>
+                  <a:lnTo>
+                    <a:pt x="4798709" y="2667239"/>
+                  </a:lnTo>
+                  <a:lnTo>
+                    <a:pt x="4727086" y="2654630"/>
+                  </a:lnTo>
+                  <a:lnTo>
+                    <a:pt x="4655464" y="2641637"/>
+                  </a:lnTo>
+                  <a:lnTo>
+                    <a:pt x="4583841" y="2628250"/>
+                  </a:lnTo>
+                  <a:lnTo>
+                    <a:pt x="4512219" y="2614456"/>
+                  </a:lnTo>
+                  <a:lnTo>
+                    <a:pt x="4440596" y="2600243"/>
+                  </a:lnTo>
+                  <a:lnTo>
+                    <a:pt x="4368974" y="2585599"/>
+                  </a:lnTo>
+                  <a:lnTo>
+                    <a:pt x="4297351" y="2570509"/>
+                  </a:lnTo>
+                  <a:lnTo>
+                    <a:pt x="4225729" y="2554962"/>
+                  </a:lnTo>
+                  <a:lnTo>
+                    <a:pt x="4154106" y="2538942"/>
+                  </a:lnTo>
+                  <a:lnTo>
+                    <a:pt x="4082483" y="2522435"/>
+                  </a:lnTo>
+                  <a:lnTo>
+                    <a:pt x="4010861" y="2505427"/>
+                  </a:lnTo>
+                  <a:lnTo>
+                    <a:pt x="3939238" y="2487902"/>
+                  </a:lnTo>
+                  <a:lnTo>
+                    <a:pt x="3867616" y="2469845"/>
+                  </a:lnTo>
+                  <a:lnTo>
+                    <a:pt x="3795993" y="2451240"/>
+                  </a:lnTo>
+                  <a:lnTo>
+                    <a:pt x="3724371" y="2432069"/>
+                  </a:lnTo>
+                  <a:lnTo>
+                    <a:pt x="3652748" y="2412316"/>
+                  </a:lnTo>
+                  <a:lnTo>
+                    <a:pt x="3581126" y="2391963"/>
+                  </a:lnTo>
+                  <a:lnTo>
+                    <a:pt x="3509503" y="2370991"/>
+                  </a:lnTo>
+                  <a:lnTo>
+                    <a:pt x="3437881" y="2349383"/>
+                  </a:lnTo>
+                  <a:lnTo>
+                    <a:pt x="3366258" y="2327118"/>
+                  </a:lnTo>
+                  <a:lnTo>
+                    <a:pt x="3294636" y="2304177"/>
+                  </a:lnTo>
+                  <a:lnTo>
+                    <a:pt x="3223013" y="2280539"/>
+                  </a:lnTo>
+                  <a:lnTo>
+                    <a:pt x="3151391" y="2256183"/>
+                  </a:lnTo>
+                  <a:lnTo>
+                    <a:pt x="3079768" y="2247584"/>
+                  </a:lnTo>
+                  <a:lnTo>
+                    <a:pt x="3008146" y="2241424"/>
+                  </a:lnTo>
+                  <a:lnTo>
+                    <a:pt x="2936523" y="2235218"/>
+                  </a:lnTo>
+                  <a:lnTo>
+                    <a:pt x="2864901" y="2228967"/>
+                  </a:lnTo>
+                  <a:lnTo>
+                    <a:pt x="2793278" y="2222669"/>
+                  </a:lnTo>
+                  <a:lnTo>
+                    <a:pt x="2721655" y="2216325"/>
+                  </a:lnTo>
+                  <a:lnTo>
+                    <a:pt x="2650033" y="2209934"/>
+                  </a:lnTo>
+                  <a:lnTo>
+                    <a:pt x="2578410" y="2203496"/>
+                  </a:lnTo>
+                  <a:lnTo>
+                    <a:pt x="2506788" y="2197011"/>
+                  </a:lnTo>
+                  <a:lnTo>
+                    <a:pt x="2435165" y="2190477"/>
+                  </a:lnTo>
+                  <a:lnTo>
+                    <a:pt x="2363543" y="2183895"/>
+                  </a:lnTo>
+                  <a:lnTo>
+                    <a:pt x="2291920" y="2177265"/>
+                  </a:lnTo>
+                  <a:lnTo>
+                    <a:pt x="2220298" y="2170586"/>
+                  </a:lnTo>
+                  <a:lnTo>
+                    <a:pt x="2148675" y="2163857"/>
+                  </a:lnTo>
+                  <a:lnTo>
+                    <a:pt x="2077053" y="2157079"/>
+                  </a:lnTo>
+                  <a:lnTo>
+                    <a:pt x="2005430" y="2150251"/>
+                  </a:lnTo>
+                  <a:lnTo>
+                    <a:pt x="1933808" y="2143373"/>
+                  </a:lnTo>
+                  <a:lnTo>
+                    <a:pt x="1862185" y="2136443"/>
+                  </a:lnTo>
+                  <a:lnTo>
+                    <a:pt x="1790563" y="2129463"/>
+                  </a:lnTo>
+                  <a:lnTo>
+                    <a:pt x="1718940" y="2122431"/>
+                  </a:lnTo>
+                  <a:lnTo>
+                    <a:pt x="1647318" y="2115347"/>
+                  </a:lnTo>
+                  <a:lnTo>
+                    <a:pt x="1575695" y="2108211"/>
+                  </a:lnTo>
+                  <a:lnTo>
+                    <a:pt x="1504073" y="2101022"/>
+                  </a:lnTo>
+                  <a:lnTo>
+                    <a:pt x="1432450" y="2093780"/>
+                  </a:lnTo>
+                  <a:lnTo>
+                    <a:pt x="1360827" y="2086485"/>
+                  </a:lnTo>
+                  <a:lnTo>
+                    <a:pt x="1289205" y="2079136"/>
+                  </a:lnTo>
+                  <a:lnTo>
+                    <a:pt x="1217582" y="2071733"/>
+                  </a:lnTo>
+                  <a:lnTo>
+                    <a:pt x="1145960" y="2064275"/>
+                  </a:lnTo>
+                  <a:lnTo>
+                    <a:pt x="1074337" y="2056762"/>
+                  </a:lnTo>
+                  <a:lnTo>
+                    <a:pt x="1002715" y="2049193"/>
+                  </a:lnTo>
+                  <a:lnTo>
+                    <a:pt x="931092" y="2041569"/>
+                  </a:lnTo>
+                  <a:lnTo>
+                    <a:pt x="859470" y="2033888"/>
+                  </a:lnTo>
+                  <a:lnTo>
+                    <a:pt x="787847" y="2026151"/>
+                  </a:lnTo>
+                  <a:lnTo>
+                    <a:pt x="716225" y="2018357"/>
+                  </a:lnTo>
+                  <a:lnTo>
+                    <a:pt x="644602" y="2010505"/>
+                  </a:lnTo>
+                  <a:lnTo>
+                    <a:pt x="572980" y="2002595"/>
+                  </a:lnTo>
+                  <a:lnTo>
+                    <a:pt x="501357" y="1994627"/>
+                  </a:lnTo>
+                  <a:lnTo>
+                    <a:pt x="429735" y="1986600"/>
+                  </a:lnTo>
+                  <a:lnTo>
+                    <a:pt x="358112" y="1978514"/>
+                  </a:lnTo>
+                  <a:lnTo>
+                    <a:pt x="286490" y="1970368"/>
+                  </a:lnTo>
+                  <a:lnTo>
+                    <a:pt x="214867" y="1962162"/>
+                  </a:lnTo>
+                  <a:lnTo>
+                    <a:pt x="143245" y="1953895"/>
+                  </a:lnTo>
+                  <a:lnTo>
+                    <a:pt x="71622" y="1945568"/>
+                  </a:lnTo>
+                  <a:lnTo>
+                    <a:pt x="0" y="1937179"/>
                   </a:lnTo>
                   <a:close/>
                 </a:path>
@@ -3633,312 +3633,312 @@
           </p:nvSpPr>
           <p:spPr>
             <a:xfrm>
-              <a:off x="1172049" y="2493804"/>
-              <a:ext cx="7090630" cy="2510036"/>
+              <a:off x="1172049" y="2474897"/>
+              <a:ext cx="7090630" cy="2529322"/>
             </a:xfrm>
             <a:custGeom>
               <a:avLst/>
               <a:pathLst>
-                <a:path w="7090630" h="2510036">
+                <a:path w="7090630" h="2529322">
                   <a:moveTo>
                     <a:pt x="0" y="0"/>
                   </a:moveTo>
                   <a:lnTo>
-                    <a:pt x="71622" y="89902"/>
-                  </a:lnTo>
-                  <a:lnTo>
-                    <a:pt x="143245" y="177166"/>
-                  </a:lnTo>
-                  <a:lnTo>
-                    <a:pt x="214867" y="261868"/>
-                  </a:lnTo>
-                  <a:lnTo>
-                    <a:pt x="286490" y="344086"/>
-                  </a:lnTo>
-                  <a:lnTo>
-                    <a:pt x="358112" y="423890"/>
-                  </a:lnTo>
-                  <a:lnTo>
-                    <a:pt x="429735" y="501352"/>
-                  </a:lnTo>
-                  <a:lnTo>
-                    <a:pt x="501357" y="576541"/>
-                  </a:lnTo>
-                  <a:lnTo>
-                    <a:pt x="572980" y="649524"/>
-                  </a:lnTo>
-                  <a:lnTo>
-                    <a:pt x="644602" y="720365"/>
-                  </a:lnTo>
-                  <a:lnTo>
-                    <a:pt x="716225" y="789127"/>
-                  </a:lnTo>
-                  <a:lnTo>
-                    <a:pt x="787847" y="855870"/>
-                  </a:lnTo>
-                  <a:lnTo>
-                    <a:pt x="859470" y="920656"/>
-                  </a:lnTo>
-                  <a:lnTo>
-                    <a:pt x="931092" y="983540"/>
-                  </a:lnTo>
-                  <a:lnTo>
-                    <a:pt x="1002715" y="1044578"/>
-                  </a:lnTo>
-                  <a:lnTo>
-                    <a:pt x="1074337" y="1103825"/>
-                  </a:lnTo>
-                  <a:lnTo>
-                    <a:pt x="1145960" y="1161334"/>
-                  </a:lnTo>
-                  <a:lnTo>
-                    <a:pt x="1217582" y="1217154"/>
-                  </a:lnTo>
-                  <a:lnTo>
-                    <a:pt x="1289205" y="1271337"/>
-                  </a:lnTo>
-                  <a:lnTo>
-                    <a:pt x="1360827" y="1323930"/>
-                  </a:lnTo>
-                  <a:lnTo>
-                    <a:pt x="1432450" y="1374979"/>
-                  </a:lnTo>
-                  <a:lnTo>
-                    <a:pt x="1504073" y="1424530"/>
-                  </a:lnTo>
-                  <a:lnTo>
-                    <a:pt x="1575695" y="1472627"/>
-                  </a:lnTo>
-                  <a:lnTo>
-                    <a:pt x="1647318" y="1519312"/>
-                  </a:lnTo>
-                  <a:lnTo>
-                    <a:pt x="1718940" y="1564627"/>
-                  </a:lnTo>
-                  <a:lnTo>
-                    <a:pt x="1790563" y="1608613"/>
-                  </a:lnTo>
-                  <a:lnTo>
-                    <a:pt x="1862185" y="1651307"/>
-                  </a:lnTo>
-                  <a:lnTo>
-                    <a:pt x="1933808" y="1692749"/>
-                  </a:lnTo>
-                  <a:lnTo>
-                    <a:pt x="2005430" y="1732974"/>
-                  </a:lnTo>
-                  <a:lnTo>
-                    <a:pt x="2077053" y="1772019"/>
-                  </a:lnTo>
-                  <a:lnTo>
-                    <a:pt x="2148675" y="1809919"/>
-                  </a:lnTo>
-                  <a:lnTo>
-                    <a:pt x="2220298" y="1846706"/>
-                  </a:lnTo>
-                  <a:lnTo>
-                    <a:pt x="2291920" y="1882413"/>
-                  </a:lnTo>
-                  <a:lnTo>
-                    <a:pt x="2363543" y="1917072"/>
-                  </a:lnTo>
-                  <a:lnTo>
-                    <a:pt x="2435165" y="1950715"/>
-                  </a:lnTo>
-                  <a:lnTo>
-                    <a:pt x="2506788" y="1983370"/>
-                  </a:lnTo>
-                  <a:lnTo>
-                    <a:pt x="2578410" y="2015066"/>
-                  </a:lnTo>
-                  <a:lnTo>
-                    <a:pt x="2650033" y="2045833"/>
-                  </a:lnTo>
-                  <a:lnTo>
-                    <a:pt x="2721655" y="2075697"/>
-                  </a:lnTo>
-                  <a:lnTo>
-                    <a:pt x="2793278" y="2104684"/>
-                  </a:lnTo>
-                  <a:lnTo>
-                    <a:pt x="2864901" y="2132820"/>
-                  </a:lnTo>
-                  <a:lnTo>
-                    <a:pt x="2936523" y="2160131"/>
-                  </a:lnTo>
-                  <a:lnTo>
-                    <a:pt x="3008146" y="2186640"/>
-                  </a:lnTo>
-                  <a:lnTo>
-                    <a:pt x="3079768" y="2212372"/>
-                  </a:lnTo>
-                  <a:lnTo>
-                    <a:pt x="3151391" y="2234813"/>
-                  </a:lnTo>
-                  <a:lnTo>
-                    <a:pt x="3223013" y="2240872"/>
-                  </a:lnTo>
-                  <a:lnTo>
-                    <a:pt x="3294636" y="2246887"/>
-                  </a:lnTo>
-                  <a:lnTo>
-                    <a:pt x="3366258" y="2252859"/>
-                  </a:lnTo>
-                  <a:lnTo>
-                    <a:pt x="3437881" y="2258786"/>
-                  </a:lnTo>
-                  <a:lnTo>
-                    <a:pt x="3509503" y="2264671"/>
-                  </a:lnTo>
-                  <a:lnTo>
-                    <a:pt x="3581126" y="2270512"/>
-                  </a:lnTo>
-                  <a:lnTo>
-                    <a:pt x="3652748" y="2276310"/>
-                  </a:lnTo>
-                  <a:lnTo>
-                    <a:pt x="3724371" y="2282066"/>
-                  </a:lnTo>
-                  <a:lnTo>
-                    <a:pt x="3795993" y="2287780"/>
-                  </a:lnTo>
-                  <a:lnTo>
-                    <a:pt x="3867616" y="2293453"/>
-                  </a:lnTo>
-                  <a:lnTo>
-                    <a:pt x="3939238" y="2299083"/>
-                  </a:lnTo>
-                  <a:lnTo>
-                    <a:pt x="4010861" y="2304673"/>
-                  </a:lnTo>
-                  <a:lnTo>
-                    <a:pt x="4082483" y="2310222"/>
-                  </a:lnTo>
-                  <a:lnTo>
-                    <a:pt x="4154106" y="2315730"/>
-                  </a:lnTo>
-                  <a:lnTo>
-                    <a:pt x="4225729" y="2321198"/>
-                  </a:lnTo>
-                  <a:lnTo>
-                    <a:pt x="4297351" y="2326626"/>
-                  </a:lnTo>
-                  <a:lnTo>
-                    <a:pt x="4368974" y="2332014"/>
-                  </a:lnTo>
-                  <a:lnTo>
-                    <a:pt x="4440596" y="2337362"/>
-                  </a:lnTo>
-                  <a:lnTo>
-                    <a:pt x="4512219" y="2342672"/>
-                  </a:lnTo>
-                  <a:lnTo>
-                    <a:pt x="4583841" y="2347943"/>
-                  </a:lnTo>
-                  <a:lnTo>
-                    <a:pt x="4655464" y="2353175"/>
-                  </a:lnTo>
-                  <a:lnTo>
-                    <a:pt x="4727086" y="2358369"/>
-                  </a:lnTo>
-                  <a:lnTo>
-                    <a:pt x="4798709" y="2363525"/>
-                  </a:lnTo>
-                  <a:lnTo>
-                    <a:pt x="4870331" y="2368644"/>
-                  </a:lnTo>
-                  <a:lnTo>
-                    <a:pt x="4941954" y="2373725"/>
-                  </a:lnTo>
-                  <a:lnTo>
-                    <a:pt x="5013576" y="2378768"/>
-                  </a:lnTo>
-                  <a:lnTo>
-                    <a:pt x="5085199" y="2383775"/>
-                  </a:lnTo>
-                  <a:lnTo>
-                    <a:pt x="5156821" y="2388745"/>
-                  </a:lnTo>
-                  <a:lnTo>
-                    <a:pt x="5228444" y="2393679"/>
-                  </a:lnTo>
-                  <a:lnTo>
-                    <a:pt x="5300066" y="2398577"/>
-                  </a:lnTo>
-                  <a:lnTo>
-                    <a:pt x="5371689" y="2403439"/>
-                  </a:lnTo>
-                  <a:lnTo>
-                    <a:pt x="5443311" y="2408266"/>
-                  </a:lnTo>
-                  <a:lnTo>
-                    <a:pt x="5514934" y="2413057"/>
-                  </a:lnTo>
-                  <a:lnTo>
-                    <a:pt x="5586557" y="2417813"/>
-                  </a:lnTo>
-                  <a:lnTo>
-                    <a:pt x="5658179" y="2422534"/>
-                  </a:lnTo>
-                  <a:lnTo>
-                    <a:pt x="5729802" y="2427221"/>
-                  </a:lnTo>
-                  <a:lnTo>
-                    <a:pt x="5801424" y="2431874"/>
-                  </a:lnTo>
-                  <a:lnTo>
-                    <a:pt x="5873047" y="2436492"/>
-                  </a:lnTo>
-                  <a:lnTo>
-                    <a:pt x="5944669" y="2441077"/>
-                  </a:lnTo>
-                  <a:lnTo>
-                    <a:pt x="6016292" y="2445628"/>
-                  </a:lnTo>
-                  <a:lnTo>
-                    <a:pt x="6087914" y="2450146"/>
-                  </a:lnTo>
-                  <a:lnTo>
-                    <a:pt x="6159537" y="2454631"/>
-                  </a:lnTo>
-                  <a:lnTo>
-                    <a:pt x="6231159" y="2459083"/>
-                  </a:lnTo>
-                  <a:lnTo>
-                    <a:pt x="6302782" y="2463503"/>
-                  </a:lnTo>
-                  <a:lnTo>
-                    <a:pt x="6374404" y="2467890"/>
-                  </a:lnTo>
-                  <a:lnTo>
-                    <a:pt x="6446027" y="2472245"/>
-                  </a:lnTo>
-                  <a:lnTo>
-                    <a:pt x="6517649" y="2476568"/>
-                  </a:lnTo>
-                  <a:lnTo>
-                    <a:pt x="6589272" y="2480860"/>
-                  </a:lnTo>
-                  <a:lnTo>
-                    <a:pt x="6660894" y="2485120"/>
-                  </a:lnTo>
-                  <a:lnTo>
-                    <a:pt x="6732517" y="2489349"/>
-                  </a:lnTo>
-                  <a:lnTo>
-                    <a:pt x="6804139" y="2493548"/>
-                  </a:lnTo>
-                  <a:lnTo>
-                    <a:pt x="6875762" y="2497715"/>
-                  </a:lnTo>
-                  <a:lnTo>
-                    <a:pt x="6947385" y="2501852"/>
-                  </a:lnTo>
-                  <a:lnTo>
-                    <a:pt x="7019007" y="2505959"/>
-                  </a:lnTo>
-                  <a:lnTo>
-                    <a:pt x="7090630" y="2510036"/>
+                    <a:pt x="71622" y="90869"/>
+                  </a:lnTo>
+                  <a:lnTo>
+                    <a:pt x="143245" y="179060"/>
+                  </a:lnTo>
+                  <a:lnTo>
+                    <a:pt x="214867" y="264650"/>
+                  </a:lnTo>
+                  <a:lnTo>
+                    <a:pt x="286490" y="347718"/>
+                  </a:lnTo>
+                  <a:lnTo>
+                    <a:pt x="358112" y="428336"/>
+                  </a:lnTo>
+                  <a:lnTo>
+                    <a:pt x="429735" y="506578"/>
+                  </a:lnTo>
+                  <a:lnTo>
+                    <a:pt x="501357" y="582513"/>
+                  </a:lnTo>
+                  <a:lnTo>
+                    <a:pt x="572980" y="656210"/>
+                  </a:lnTo>
+                  <a:lnTo>
+                    <a:pt x="644602" y="727734"/>
+                  </a:lnTo>
+                  <a:lnTo>
+                    <a:pt x="716225" y="797150"/>
+                  </a:lnTo>
+                  <a:lnTo>
+                    <a:pt x="787847" y="864519"/>
+                  </a:lnTo>
+                  <a:lnTo>
+                    <a:pt x="859470" y="929902"/>
+                  </a:lnTo>
+                  <a:lnTo>
+                    <a:pt x="931092" y="993357"/>
+                  </a:lnTo>
+                  <a:lnTo>
+                    <a:pt x="1002715" y="1054942"/>
+                  </a:lnTo>
+                  <a:lnTo>
+                    <a:pt x="1074337" y="1114711"/>
+                  </a:lnTo>
+                  <a:lnTo>
+                    <a:pt x="1145960" y="1172718"/>
+                  </a:lnTo>
+                  <a:lnTo>
+                    <a:pt x="1217582" y="1229015"/>
+                  </a:lnTo>
+                  <a:lnTo>
+                    <a:pt x="1289205" y="1283653"/>
+                  </a:lnTo>
+                  <a:lnTo>
+                    <a:pt x="1360827" y="1336679"/>
+                  </a:lnTo>
+                  <a:lnTo>
+                    <a:pt x="1432450" y="1388143"/>
+                  </a:lnTo>
+                  <a:lnTo>
+                    <a:pt x="1504073" y="1438089"/>
+                  </a:lnTo>
+                  <a:lnTo>
+                    <a:pt x="1575695" y="1486563"/>
+                  </a:lnTo>
+                  <a:lnTo>
+                    <a:pt x="1647318" y="1533608"/>
+                  </a:lnTo>
+                  <a:lnTo>
+                    <a:pt x="1718940" y="1579265"/>
+                  </a:lnTo>
+                  <a:lnTo>
+                    <a:pt x="1790563" y="1623577"/>
+                  </a:lnTo>
+                  <a:lnTo>
+                    <a:pt x="1862185" y="1666583"/>
+                  </a:lnTo>
+                  <a:lnTo>
+                    <a:pt x="1933808" y="1708320"/>
+                  </a:lnTo>
+                  <a:lnTo>
+                    <a:pt x="2005430" y="1748828"/>
+                  </a:lnTo>
+                  <a:lnTo>
+                    <a:pt x="2077053" y="1788141"/>
+                  </a:lnTo>
+                  <a:lnTo>
+                    <a:pt x="2148675" y="1826295"/>
+                  </a:lnTo>
+                  <a:lnTo>
+                    <a:pt x="2220298" y="1863324"/>
+                  </a:lnTo>
+                  <a:lnTo>
+                    <a:pt x="2291920" y="1899262"/>
+                  </a:lnTo>
+                  <a:lnTo>
+                    <a:pt x="2363543" y="1934140"/>
+                  </a:lnTo>
+                  <a:lnTo>
+                    <a:pt x="2435165" y="1967990"/>
+                  </a:lnTo>
+                  <a:lnTo>
+                    <a:pt x="2506788" y="2000842"/>
+                  </a:lnTo>
+                  <a:lnTo>
+                    <a:pt x="2578410" y="2032725"/>
+                  </a:lnTo>
+                  <a:lnTo>
+                    <a:pt x="2650033" y="2063669"/>
+                  </a:lnTo>
+                  <a:lnTo>
+                    <a:pt x="2721655" y="2093700"/>
+                  </a:lnTo>
+                  <a:lnTo>
+                    <a:pt x="2793278" y="2122846"/>
+                  </a:lnTo>
+                  <a:lnTo>
+                    <a:pt x="2864901" y="2151133"/>
+                  </a:lnTo>
+                  <a:lnTo>
+                    <a:pt x="2936523" y="2178586"/>
+                  </a:lnTo>
+                  <a:lnTo>
+                    <a:pt x="3008146" y="2205230"/>
+                  </a:lnTo>
+                  <a:lnTo>
+                    <a:pt x="3079768" y="2231088"/>
+                  </a:lnTo>
+                  <a:lnTo>
+                    <a:pt x="3151391" y="2253700"/>
+                  </a:lnTo>
+                  <a:lnTo>
+                    <a:pt x="3223013" y="2259770"/>
+                  </a:lnTo>
+                  <a:lnTo>
+                    <a:pt x="3294636" y="2265796"/>
+                  </a:lnTo>
+                  <a:lnTo>
+                    <a:pt x="3366258" y="2271777"/>
+                  </a:lnTo>
+                  <a:lnTo>
+                    <a:pt x="3437881" y="2277715"/>
+                  </a:lnTo>
+                  <a:lnTo>
+                    <a:pt x="3509503" y="2283610"/>
+                  </a:lnTo>
+                  <a:lnTo>
+                    <a:pt x="3581126" y="2289461"/>
+                  </a:lnTo>
+                  <a:lnTo>
+                    <a:pt x="3652748" y="2295269"/>
+                  </a:lnTo>
+                  <a:lnTo>
+                    <a:pt x="3724371" y="2301035"/>
+                  </a:lnTo>
+                  <a:lnTo>
+                    <a:pt x="3795993" y="2306759"/>
+                  </a:lnTo>
+                  <a:lnTo>
+                    <a:pt x="3867616" y="2312440"/>
+                  </a:lnTo>
+                  <a:lnTo>
+                    <a:pt x="3939238" y="2318080"/>
+                  </a:lnTo>
+                  <a:lnTo>
+                    <a:pt x="4010861" y="2323679"/>
+                  </a:lnTo>
+                  <a:lnTo>
+                    <a:pt x="4082483" y="2329237"/>
+                  </a:lnTo>
+                  <a:lnTo>
+                    <a:pt x="4154106" y="2334754"/>
+                  </a:lnTo>
+                  <a:lnTo>
+                    <a:pt x="4225729" y="2340230"/>
+                  </a:lnTo>
+                  <a:lnTo>
+                    <a:pt x="4297351" y="2345667"/>
+                  </a:lnTo>
+                  <a:lnTo>
+                    <a:pt x="4368974" y="2351063"/>
+                  </a:lnTo>
+                  <a:lnTo>
+                    <a:pt x="4440596" y="2356421"/>
+                  </a:lnTo>
+                  <a:lnTo>
+                    <a:pt x="4512219" y="2361738"/>
+                  </a:lnTo>
+                  <a:lnTo>
+                    <a:pt x="4583841" y="2367017"/>
+                  </a:lnTo>
+                  <a:lnTo>
+                    <a:pt x="4655464" y="2372258"/>
+                  </a:lnTo>
+                  <a:lnTo>
+                    <a:pt x="4727086" y="2377459"/>
+                  </a:lnTo>
+                  <a:lnTo>
+                    <a:pt x="4798709" y="2382623"/>
+                  </a:lnTo>
+                  <a:lnTo>
+                    <a:pt x="4870331" y="2387749"/>
+                  </a:lnTo>
+                  <a:lnTo>
+                    <a:pt x="4941954" y="2392837"/>
+                  </a:lnTo>
+                  <a:lnTo>
+                    <a:pt x="5013576" y="2397888"/>
+                  </a:lnTo>
+                  <a:lnTo>
+                    <a:pt x="5085199" y="2402903"/>
+                  </a:lnTo>
+                  <a:lnTo>
+                    <a:pt x="5156821" y="2407880"/>
+                  </a:lnTo>
+                  <a:lnTo>
+                    <a:pt x="5228444" y="2412821"/>
+                  </a:lnTo>
+                  <a:lnTo>
+                    <a:pt x="5300066" y="2417725"/>
+                  </a:lnTo>
+                  <a:lnTo>
+                    <a:pt x="5371689" y="2422594"/>
+                  </a:lnTo>
+                  <a:lnTo>
+                    <a:pt x="5443311" y="2427427"/>
+                  </a:lnTo>
+                  <a:lnTo>
+                    <a:pt x="5514934" y="2432225"/>
+                  </a:lnTo>
+                  <a:lnTo>
+                    <a:pt x="5586557" y="2436987"/>
+                  </a:lnTo>
+                  <a:lnTo>
+                    <a:pt x="5658179" y="2441715"/>
+                  </a:lnTo>
+                  <a:lnTo>
+                    <a:pt x="5729802" y="2446408"/>
+                  </a:lnTo>
+                  <a:lnTo>
+                    <a:pt x="5801424" y="2451067"/>
+                  </a:lnTo>
+                  <a:lnTo>
+                    <a:pt x="5873047" y="2455691"/>
+                  </a:lnTo>
+                  <a:lnTo>
+                    <a:pt x="5944669" y="2460282"/>
+                  </a:lnTo>
+                  <a:lnTo>
+                    <a:pt x="6016292" y="2464839"/>
+                  </a:lnTo>
+                  <a:lnTo>
+                    <a:pt x="6087914" y="2469363"/>
+                  </a:lnTo>
+                  <a:lnTo>
+                    <a:pt x="6159537" y="2473853"/>
+                  </a:lnTo>
+                  <a:lnTo>
+                    <a:pt x="6231159" y="2478311"/>
+                  </a:lnTo>
+                  <a:lnTo>
+                    <a:pt x="6302782" y="2482736"/>
+                  </a:lnTo>
+                  <a:lnTo>
+                    <a:pt x="6374404" y="2487128"/>
+                  </a:lnTo>
+                  <a:lnTo>
+                    <a:pt x="6446027" y="2491488"/>
+                  </a:lnTo>
+                  <a:lnTo>
+                    <a:pt x="6517649" y="2495817"/>
+                  </a:lnTo>
+                  <a:lnTo>
+                    <a:pt x="6589272" y="2500114"/>
+                  </a:lnTo>
+                  <a:lnTo>
+                    <a:pt x="6660894" y="2504379"/>
+                  </a:lnTo>
+                  <a:lnTo>
+                    <a:pt x="6732517" y="2508613"/>
+                  </a:lnTo>
+                  <a:lnTo>
+                    <a:pt x="6804139" y="2512816"/>
+                  </a:lnTo>
+                  <a:lnTo>
+                    <a:pt x="6875762" y="2516988"/>
+                  </a:lnTo>
+                  <a:lnTo>
+                    <a:pt x="6947385" y="2521129"/>
+                  </a:lnTo>
+                  <a:lnTo>
+                    <a:pt x="7019007" y="2525241"/>
+                  </a:lnTo>
+                  <a:lnTo>
+                    <a:pt x="7090630" y="2529322"/>
                   </a:lnTo>
                 </a:path>
               </a:pathLst>
@@ -3958,309 +3958,309 @@
           </p:nvSpPr>
           <p:spPr>
             <a:xfrm>
-              <a:off x="1172049" y="4412753"/>
-              <a:ext cx="7090630" cy="983965"/>
+              <a:off x="1172049" y="4412076"/>
+              <a:ext cx="7090630" cy="985842"/>
             </a:xfrm>
             <a:custGeom>
               <a:avLst/>
               <a:pathLst>
-                <a:path w="7090630" h="983965">
+                <a:path w="7090630" h="985842">
                   <a:moveTo>
-                    <a:pt x="7090630" y="983965"/>
+                    <a:pt x="7090630" y="985842"/>
                   </a:moveTo>
                   <a:lnTo>
-                    <a:pt x="7019007" y="979112"/>
-                  </a:lnTo>
-                  <a:lnTo>
-                    <a:pt x="6947385" y="974112"/>
-                  </a:lnTo>
-                  <a:lnTo>
-                    <a:pt x="6875762" y="968960"/>
-                  </a:lnTo>
-                  <a:lnTo>
-                    <a:pt x="6804139" y="963653"/>
-                  </a:lnTo>
-                  <a:lnTo>
-                    <a:pt x="6732517" y="958186"/>
-                  </a:lnTo>
-                  <a:lnTo>
-                    <a:pt x="6660894" y="952553"/>
-                  </a:lnTo>
-                  <a:lnTo>
-                    <a:pt x="6589272" y="946749"/>
-                  </a:lnTo>
-                  <a:lnTo>
-                    <a:pt x="6517649" y="940771"/>
-                  </a:lnTo>
-                  <a:lnTo>
-                    <a:pt x="6446027" y="934611"/>
-                  </a:lnTo>
-                  <a:lnTo>
-                    <a:pt x="6374404" y="928266"/>
-                  </a:lnTo>
-                  <a:lnTo>
-                    <a:pt x="6302782" y="921728"/>
-                  </a:lnTo>
-                  <a:lnTo>
-                    <a:pt x="6231159" y="914993"/>
-                  </a:lnTo>
-                  <a:lnTo>
-                    <a:pt x="6159537" y="908054"/>
-                  </a:lnTo>
-                  <a:lnTo>
-                    <a:pt x="6087914" y="900906"/>
-                  </a:lnTo>
-                  <a:lnTo>
-                    <a:pt x="6016292" y="893541"/>
-                  </a:lnTo>
-                  <a:lnTo>
-                    <a:pt x="5944669" y="885954"/>
-                  </a:lnTo>
-                  <a:lnTo>
-                    <a:pt x="5873047" y="878137"/>
-                  </a:lnTo>
-                  <a:lnTo>
-                    <a:pt x="5801424" y="870084"/>
-                  </a:lnTo>
-                  <a:lnTo>
-                    <a:pt x="5729802" y="861787"/>
-                  </a:lnTo>
-                  <a:lnTo>
-                    <a:pt x="5658179" y="853240"/>
-                  </a:lnTo>
-                  <a:lnTo>
-                    <a:pt x="5586557" y="844434"/>
-                  </a:lnTo>
-                  <a:lnTo>
-                    <a:pt x="5514934" y="835362"/>
-                  </a:lnTo>
-                  <a:lnTo>
-                    <a:pt x="5443311" y="826015"/>
-                  </a:lnTo>
-                  <a:lnTo>
-                    <a:pt x="5371689" y="816386"/>
-                  </a:lnTo>
-                  <a:lnTo>
-                    <a:pt x="5300066" y="806466"/>
-                  </a:lnTo>
-                  <a:lnTo>
-                    <a:pt x="5228444" y="796246"/>
-                  </a:lnTo>
-                  <a:lnTo>
-                    <a:pt x="5156821" y="785717"/>
-                  </a:lnTo>
-                  <a:lnTo>
-                    <a:pt x="5085199" y="774870"/>
-                  </a:lnTo>
-                  <a:lnTo>
-                    <a:pt x="5013576" y="763695"/>
-                  </a:lnTo>
-                  <a:lnTo>
-                    <a:pt x="4941954" y="752182"/>
-                  </a:lnTo>
-                  <a:lnTo>
-                    <a:pt x="4870331" y="740320"/>
-                  </a:lnTo>
-                  <a:lnTo>
-                    <a:pt x="4798709" y="728101"/>
-                  </a:lnTo>
-                  <a:lnTo>
-                    <a:pt x="4727086" y="715511"/>
-                  </a:lnTo>
-                  <a:lnTo>
-                    <a:pt x="4655464" y="702541"/>
-                  </a:lnTo>
-                  <a:lnTo>
-                    <a:pt x="4583841" y="689179"/>
-                  </a:lnTo>
-                  <a:lnTo>
-                    <a:pt x="4512219" y="675413"/>
-                  </a:lnTo>
-                  <a:lnTo>
-                    <a:pt x="4440596" y="661231"/>
-                  </a:lnTo>
-                  <a:lnTo>
-                    <a:pt x="4368974" y="646620"/>
-                  </a:lnTo>
-                  <a:lnTo>
-                    <a:pt x="4297351" y="631567"/>
-                  </a:lnTo>
-                  <a:lnTo>
-                    <a:pt x="4225729" y="616059"/>
-                  </a:lnTo>
-                  <a:lnTo>
-                    <a:pt x="4154106" y="600082"/>
-                  </a:lnTo>
-                  <a:lnTo>
-                    <a:pt x="4082483" y="583623"/>
-                  </a:lnTo>
-                  <a:lnTo>
-                    <a:pt x="4010861" y="566665"/>
-                  </a:lnTo>
-                  <a:lnTo>
-                    <a:pt x="3939238" y="549195"/>
-                  </a:lnTo>
-                  <a:lnTo>
-                    <a:pt x="3867616" y="531197"/>
-                  </a:lnTo>
-                  <a:lnTo>
-                    <a:pt x="3795993" y="512654"/>
-                  </a:lnTo>
-                  <a:lnTo>
-                    <a:pt x="3724371" y="493551"/>
-                  </a:lnTo>
-                  <a:lnTo>
-                    <a:pt x="3652748" y="473870"/>
-                  </a:lnTo>
-                  <a:lnTo>
-                    <a:pt x="3581126" y="453595"/>
-                  </a:lnTo>
-                  <a:lnTo>
-                    <a:pt x="3509503" y="432706"/>
-                  </a:lnTo>
-                  <a:lnTo>
-                    <a:pt x="3437881" y="411186"/>
-                  </a:lnTo>
-                  <a:lnTo>
-                    <a:pt x="3366258" y="389015"/>
-                  </a:lnTo>
-                  <a:lnTo>
-                    <a:pt x="3294636" y="366174"/>
-                  </a:lnTo>
-                  <a:lnTo>
-                    <a:pt x="3223013" y="342642"/>
-                  </a:lnTo>
-                  <a:lnTo>
-                    <a:pt x="3151391" y="318399"/>
-                  </a:lnTo>
-                  <a:lnTo>
-                    <a:pt x="3079768" y="309759"/>
-                  </a:lnTo>
-                  <a:lnTo>
-                    <a:pt x="3008146" y="303610"/>
-                  </a:lnTo>
-                  <a:lnTo>
-                    <a:pt x="2936523" y="297415"/>
-                  </a:lnTo>
-                  <a:lnTo>
-                    <a:pt x="2864901" y="291175"/>
-                  </a:lnTo>
-                  <a:lnTo>
-                    <a:pt x="2793278" y="284889"/>
-                  </a:lnTo>
-                  <a:lnTo>
-                    <a:pt x="2721655" y="278557"/>
-                  </a:lnTo>
-                  <a:lnTo>
-                    <a:pt x="2650033" y="272178"/>
-                  </a:lnTo>
-                  <a:lnTo>
-                    <a:pt x="2578410" y="265751"/>
-                  </a:lnTo>
-                  <a:lnTo>
-                    <a:pt x="2506788" y="259278"/>
-                  </a:lnTo>
-                  <a:lnTo>
-                    <a:pt x="2435165" y="252757"/>
-                  </a:lnTo>
-                  <a:lnTo>
-                    <a:pt x="2363543" y="246188"/>
-                  </a:lnTo>
-                  <a:lnTo>
-                    <a:pt x="2291920" y="239570"/>
-                  </a:lnTo>
-                  <a:lnTo>
-                    <a:pt x="2220298" y="232904"/>
-                  </a:lnTo>
-                  <a:lnTo>
-                    <a:pt x="2148675" y="226189"/>
-                  </a:lnTo>
-                  <a:lnTo>
-                    <a:pt x="2077053" y="219424"/>
-                  </a:lnTo>
-                  <a:lnTo>
-                    <a:pt x="2005430" y="212609"/>
-                  </a:lnTo>
-                  <a:lnTo>
-                    <a:pt x="1933808" y="205745"/>
-                  </a:lnTo>
-                  <a:lnTo>
-                    <a:pt x="1862185" y="198829"/>
-                  </a:lnTo>
-                  <a:lnTo>
-                    <a:pt x="1790563" y="191863"/>
-                  </a:lnTo>
-                  <a:lnTo>
-                    <a:pt x="1718940" y="184845"/>
-                  </a:lnTo>
-                  <a:lnTo>
-                    <a:pt x="1647318" y="177776"/>
-                  </a:lnTo>
-                  <a:lnTo>
-                    <a:pt x="1575695" y="170654"/>
-                  </a:lnTo>
-                  <a:lnTo>
-                    <a:pt x="1504073" y="163480"/>
-                  </a:lnTo>
-                  <a:lnTo>
-                    <a:pt x="1432450" y="156254"/>
-                  </a:lnTo>
-                  <a:lnTo>
-                    <a:pt x="1360827" y="148974"/>
-                  </a:lnTo>
-                  <a:lnTo>
-                    <a:pt x="1289205" y="141640"/>
-                  </a:lnTo>
-                  <a:lnTo>
-                    <a:pt x="1217582" y="134252"/>
-                  </a:lnTo>
-                  <a:lnTo>
-                    <a:pt x="1145960" y="126810"/>
-                  </a:lnTo>
-                  <a:lnTo>
-                    <a:pt x="1074337" y="119313"/>
-                  </a:lnTo>
-                  <a:lnTo>
-                    <a:pt x="1002715" y="111761"/>
-                  </a:lnTo>
-                  <a:lnTo>
-                    <a:pt x="931092" y="104154"/>
-                  </a:lnTo>
-                  <a:lnTo>
-                    <a:pt x="859470" y="96490"/>
-                  </a:lnTo>
-                  <a:lnTo>
-                    <a:pt x="787847" y="88770"/>
-                  </a:lnTo>
-                  <a:lnTo>
-                    <a:pt x="716225" y="80992"/>
-                  </a:lnTo>
-                  <a:lnTo>
-                    <a:pt x="644602" y="73158"/>
-                  </a:lnTo>
-                  <a:lnTo>
-                    <a:pt x="572980" y="65266"/>
-                  </a:lnTo>
-                  <a:lnTo>
-                    <a:pt x="501357" y="57316"/>
-                  </a:lnTo>
-                  <a:lnTo>
-                    <a:pt x="429735" y="49307"/>
-                  </a:lnTo>
-                  <a:lnTo>
-                    <a:pt x="358112" y="41239"/>
-                  </a:lnTo>
-                  <a:lnTo>
-                    <a:pt x="286490" y="33112"/>
-                  </a:lnTo>
-                  <a:lnTo>
-                    <a:pt x="214867" y="24925"/>
-                  </a:lnTo>
-                  <a:lnTo>
-                    <a:pt x="143245" y="16677"/>
-                  </a:lnTo>
-                  <a:lnTo>
-                    <a:pt x="71622" y="8369"/>
+                    <a:pt x="7019007" y="981002"/>
+                  </a:lnTo>
+                  <a:lnTo>
+                    <a:pt x="6947385" y="976015"/>
+                  </a:lnTo>
+                  <a:lnTo>
+                    <a:pt x="6875762" y="970877"/>
+                  </a:lnTo>
+                  <a:lnTo>
+                    <a:pt x="6804139" y="965582"/>
+                  </a:lnTo>
+                  <a:lnTo>
+                    <a:pt x="6732517" y="960127"/>
+                  </a:lnTo>
+                  <a:lnTo>
+                    <a:pt x="6660894" y="954506"/>
+                  </a:lnTo>
+                  <a:lnTo>
+                    <a:pt x="6589272" y="948714"/>
+                  </a:lnTo>
+                  <a:lnTo>
+                    <a:pt x="6517649" y="942747"/>
+                  </a:lnTo>
+                  <a:lnTo>
+                    <a:pt x="6446027" y="936598"/>
+                  </a:lnTo>
+                  <a:lnTo>
+                    <a:pt x="6374404" y="930262"/>
+                  </a:lnTo>
+                  <a:lnTo>
+                    <a:pt x="6302782" y="923734"/>
+                  </a:lnTo>
+                  <a:lnTo>
+                    <a:pt x="6231159" y="917007"/>
+                  </a:lnTo>
+                  <a:lnTo>
+                    <a:pt x="6159537" y="910076"/>
+                  </a:lnTo>
+                  <a:lnTo>
+                    <a:pt x="6087914" y="902935"/>
+                  </a:lnTo>
+                  <a:lnTo>
+                    <a:pt x="6016292" y="895577"/>
+                  </a:lnTo>
+                  <a:lnTo>
+                    <a:pt x="5944669" y="887995"/>
+                  </a:lnTo>
+                  <a:lnTo>
+                    <a:pt x="5873047" y="880183"/>
+                  </a:lnTo>
+                  <a:lnTo>
+                    <a:pt x="5801424" y="872134"/>
+                  </a:lnTo>
+                  <a:lnTo>
+                    <a:pt x="5729802" y="863840"/>
+                  </a:lnTo>
+                  <a:lnTo>
+                    <a:pt x="5658179" y="855294"/>
+                  </a:lnTo>
+                  <a:lnTo>
+                    <a:pt x="5586557" y="846489"/>
+                  </a:lnTo>
+                  <a:lnTo>
+                    <a:pt x="5514934" y="837416"/>
+                  </a:lnTo>
+                  <a:lnTo>
+                    <a:pt x="5443311" y="828067"/>
+                  </a:lnTo>
+                  <a:lnTo>
+                    <a:pt x="5371689" y="818435"/>
+                  </a:lnTo>
+                  <a:lnTo>
+                    <a:pt x="5300066" y="808510"/>
+                  </a:lnTo>
+                  <a:lnTo>
+                    <a:pt x="5228444" y="798283"/>
+                  </a:lnTo>
+                  <a:lnTo>
+                    <a:pt x="5156821" y="787746"/>
+                  </a:lnTo>
+                  <a:lnTo>
+                    <a:pt x="5085199" y="776889"/>
+                  </a:lnTo>
+                  <a:lnTo>
+                    <a:pt x="5013576" y="765702"/>
+                  </a:lnTo>
+                  <a:lnTo>
+                    <a:pt x="4941954" y="754175"/>
+                  </a:lnTo>
+                  <a:lnTo>
+                    <a:pt x="4870331" y="742298"/>
+                  </a:lnTo>
+                  <a:lnTo>
+                    <a:pt x="4798709" y="730060"/>
+                  </a:lnTo>
+                  <a:lnTo>
+                    <a:pt x="4727086" y="717451"/>
+                  </a:lnTo>
+                  <a:lnTo>
+                    <a:pt x="4655464" y="704458"/>
+                  </a:lnTo>
+                  <a:lnTo>
+                    <a:pt x="4583841" y="691071"/>
+                  </a:lnTo>
+                  <a:lnTo>
+                    <a:pt x="4512219" y="677277"/>
+                  </a:lnTo>
+                  <a:lnTo>
+                    <a:pt x="4440596" y="663064"/>
+                  </a:lnTo>
+                  <a:lnTo>
+                    <a:pt x="4368974" y="648420"/>
+                  </a:lnTo>
+                  <a:lnTo>
+                    <a:pt x="4297351" y="633330"/>
+                  </a:lnTo>
+                  <a:lnTo>
+                    <a:pt x="4225729" y="617783"/>
+                  </a:lnTo>
+                  <a:lnTo>
+                    <a:pt x="4154106" y="601763"/>
+                  </a:lnTo>
+                  <a:lnTo>
+                    <a:pt x="4082483" y="585256"/>
+                  </a:lnTo>
+                  <a:lnTo>
+                    <a:pt x="4010861" y="568248"/>
+                  </a:lnTo>
+                  <a:lnTo>
+                    <a:pt x="3939238" y="550723"/>
+                  </a:lnTo>
+                  <a:lnTo>
+                    <a:pt x="3867616" y="532666"/>
+                  </a:lnTo>
+                  <a:lnTo>
+                    <a:pt x="3795993" y="514061"/>
+                  </a:lnTo>
+                  <a:lnTo>
+                    <a:pt x="3724371" y="494890"/>
+                  </a:lnTo>
+                  <a:lnTo>
+                    <a:pt x="3652748" y="475137"/>
+                  </a:lnTo>
+                  <a:lnTo>
+                    <a:pt x="3581126" y="454784"/>
+                  </a:lnTo>
+                  <a:lnTo>
+                    <a:pt x="3509503" y="433812"/>
+                  </a:lnTo>
+                  <a:lnTo>
+                    <a:pt x="3437881" y="412204"/>
+                  </a:lnTo>
+                  <a:lnTo>
+                    <a:pt x="3366258" y="389939"/>
+                  </a:lnTo>
+                  <a:lnTo>
+                    <a:pt x="3294636" y="366998"/>
+                  </a:lnTo>
+                  <a:lnTo>
+                    <a:pt x="3223013" y="343360"/>
+                  </a:lnTo>
+                  <a:lnTo>
+                    <a:pt x="3151391" y="319004"/>
+                  </a:lnTo>
+                  <a:lnTo>
+                    <a:pt x="3079768" y="310405"/>
+                  </a:lnTo>
+                  <a:lnTo>
+                    <a:pt x="3008146" y="304245"/>
+                  </a:lnTo>
+                  <a:lnTo>
+                    <a:pt x="2936523" y="298039"/>
+                  </a:lnTo>
+                  <a:lnTo>
+                    <a:pt x="2864901" y="291788"/>
+                  </a:lnTo>
+                  <a:lnTo>
+                    <a:pt x="2793278" y="285490"/>
+                  </a:lnTo>
+                  <a:lnTo>
+                    <a:pt x="2721655" y="279146"/>
+                  </a:lnTo>
+                  <a:lnTo>
+                    <a:pt x="2650033" y="272755"/>
+                  </a:lnTo>
+                  <a:lnTo>
+                    <a:pt x="2578410" y="266317"/>
+                  </a:lnTo>
+                  <a:lnTo>
+                    <a:pt x="2506788" y="259831"/>
+                  </a:lnTo>
+                  <a:lnTo>
+                    <a:pt x="2435165" y="253298"/>
+                  </a:lnTo>
+                  <a:lnTo>
+                    <a:pt x="2363543" y="246716"/>
+                  </a:lnTo>
+                  <a:lnTo>
+                    <a:pt x="2291920" y="240086"/>
+                  </a:lnTo>
+                  <a:lnTo>
+                    <a:pt x="2220298" y="233407"/>
+                  </a:lnTo>
+                  <a:lnTo>
+                    <a:pt x="2148675" y="226678"/>
+                  </a:lnTo>
+                  <a:lnTo>
+                    <a:pt x="2077053" y="219900"/>
+                  </a:lnTo>
+                  <a:lnTo>
+                    <a:pt x="2005430" y="213072"/>
+                  </a:lnTo>
+                  <a:lnTo>
+                    <a:pt x="1933808" y="206194"/>
+                  </a:lnTo>
+                  <a:lnTo>
+                    <a:pt x="1862185" y="199264"/>
+                  </a:lnTo>
+                  <a:lnTo>
+                    <a:pt x="1790563" y="192284"/>
+                  </a:lnTo>
+                  <a:lnTo>
+                    <a:pt x="1718940" y="185252"/>
+                  </a:lnTo>
+                  <a:lnTo>
+                    <a:pt x="1647318" y="178168"/>
+                  </a:lnTo>
+                  <a:lnTo>
+                    <a:pt x="1575695" y="171032"/>
+                  </a:lnTo>
+                  <a:lnTo>
+                    <a:pt x="1504073" y="163843"/>
+                  </a:lnTo>
+                  <a:lnTo>
+                    <a:pt x="1432450" y="156601"/>
+                  </a:lnTo>
+                  <a:lnTo>
+                    <a:pt x="1360827" y="149306"/>
+                  </a:lnTo>
+                  <a:lnTo>
+                    <a:pt x="1289205" y="141957"/>
+                  </a:lnTo>
+                  <a:lnTo>
+                    <a:pt x="1217582" y="134554"/>
+                  </a:lnTo>
+                  <a:lnTo>
+                    <a:pt x="1145960" y="127096"/>
+                  </a:lnTo>
+                  <a:lnTo>
+                    <a:pt x="1074337" y="119583"/>
+                  </a:lnTo>
+                  <a:lnTo>
+                    <a:pt x="1002715" y="112014"/>
+                  </a:lnTo>
+                  <a:lnTo>
+                    <a:pt x="931092" y="104390"/>
+                  </a:lnTo>
+                  <a:lnTo>
+                    <a:pt x="859470" y="96709"/>
+                  </a:lnTo>
+                  <a:lnTo>
+                    <a:pt x="787847" y="88972"/>
+                  </a:lnTo>
+                  <a:lnTo>
+                    <a:pt x="716225" y="81178"/>
+                  </a:lnTo>
+                  <a:lnTo>
+                    <a:pt x="644602" y="73326"/>
+                  </a:lnTo>
+                  <a:lnTo>
+                    <a:pt x="572980" y="65416"/>
+                  </a:lnTo>
+                  <a:lnTo>
+                    <a:pt x="501357" y="57448"/>
+                  </a:lnTo>
+                  <a:lnTo>
+                    <a:pt x="429735" y="49421"/>
+                  </a:lnTo>
+                  <a:lnTo>
+                    <a:pt x="358112" y="41335"/>
+                  </a:lnTo>
+                  <a:lnTo>
+                    <a:pt x="286490" y="33189"/>
+                  </a:lnTo>
+                  <a:lnTo>
+                    <a:pt x="214867" y="24983"/>
+                  </a:lnTo>
+                  <a:lnTo>
+                    <a:pt x="143245" y="16716"/>
+                  </a:lnTo>
+                  <a:lnTo>
+                    <a:pt x="71622" y="8389"/>
                   </a:lnTo>
                   <a:lnTo>
                     <a:pt x="0" y="0"/>
@@ -4283,312 +4283,312 @@
           </p:nvSpPr>
           <p:spPr>
             <a:xfrm>
-              <a:off x="1172049" y="3684791"/>
-              <a:ext cx="7090630" cy="1574400"/>
+              <a:off x="1172049" y="3678465"/>
+              <a:ext cx="7090630" cy="1581942"/>
             </a:xfrm>
             <a:custGeom>
               <a:avLst/>
               <a:pathLst>
-                <a:path w="7090630" h="1574400">
+                <a:path w="7090630" h="1581942">
                   <a:moveTo>
                     <a:pt x="0" y="0"/>
                   </a:moveTo>
                   <a:lnTo>
-                    <a:pt x="71622" y="34437"/>
-                  </a:lnTo>
-                  <a:lnTo>
-                    <a:pt x="143245" y="68241"/>
-                  </a:lnTo>
-                  <a:lnTo>
-                    <a:pt x="214867" y="101423"/>
-                  </a:lnTo>
-                  <a:lnTo>
-                    <a:pt x="286490" y="133996"/>
-                  </a:lnTo>
-                  <a:lnTo>
-                    <a:pt x="358112" y="165969"/>
-                  </a:lnTo>
-                  <a:lnTo>
-                    <a:pt x="429735" y="197354"/>
-                  </a:lnTo>
-                  <a:lnTo>
-                    <a:pt x="501357" y="228161"/>
-                  </a:lnTo>
-                  <a:lnTo>
-                    <a:pt x="572980" y="258403"/>
-                  </a:lnTo>
-                  <a:lnTo>
-                    <a:pt x="644602" y="288088"/>
-                  </a:lnTo>
-                  <a:lnTo>
-                    <a:pt x="716225" y="317227"/>
-                  </a:lnTo>
-                  <a:lnTo>
-                    <a:pt x="787847" y="345830"/>
-                  </a:lnTo>
-                  <a:lnTo>
-                    <a:pt x="859470" y="373907"/>
-                  </a:lnTo>
-                  <a:lnTo>
-                    <a:pt x="931092" y="401468"/>
-                  </a:lnTo>
-                  <a:lnTo>
-                    <a:pt x="1002715" y="428521"/>
-                  </a:lnTo>
-                  <a:lnTo>
-                    <a:pt x="1074337" y="455078"/>
-                  </a:lnTo>
-                  <a:lnTo>
-                    <a:pt x="1145960" y="481146"/>
-                  </a:lnTo>
-                  <a:lnTo>
-                    <a:pt x="1217582" y="506734"/>
-                  </a:lnTo>
-                  <a:lnTo>
-                    <a:pt x="1289205" y="531852"/>
-                  </a:lnTo>
-                  <a:lnTo>
-                    <a:pt x="1360827" y="556508"/>
-                  </a:lnTo>
-                  <a:lnTo>
-                    <a:pt x="1432450" y="580710"/>
-                  </a:lnTo>
-                  <a:lnTo>
-                    <a:pt x="1504073" y="604467"/>
-                  </a:lnTo>
-                  <a:lnTo>
-                    <a:pt x="1575695" y="627788"/>
-                  </a:lnTo>
-                  <a:lnTo>
-                    <a:pt x="1647318" y="650679"/>
-                  </a:lnTo>
-                  <a:lnTo>
-                    <a:pt x="1718940" y="673150"/>
-                  </a:lnTo>
-                  <a:lnTo>
-                    <a:pt x="1790563" y="695207"/>
-                  </a:lnTo>
-                  <a:lnTo>
-                    <a:pt x="1862185" y="716858"/>
-                  </a:lnTo>
-                  <a:lnTo>
-                    <a:pt x="1933808" y="738112"/>
-                  </a:lnTo>
-                  <a:lnTo>
-                    <a:pt x="2005430" y="758974"/>
-                  </a:lnTo>
-                  <a:lnTo>
-                    <a:pt x="2077053" y="779453"/>
-                  </a:lnTo>
-                  <a:lnTo>
-                    <a:pt x="2148675" y="799555"/>
-                  </a:lnTo>
-                  <a:lnTo>
-                    <a:pt x="2220298" y="819287"/>
-                  </a:lnTo>
-                  <a:lnTo>
-                    <a:pt x="2291920" y="838657"/>
-                  </a:lnTo>
-                  <a:lnTo>
-                    <a:pt x="2363543" y="857670"/>
-                  </a:lnTo>
-                  <a:lnTo>
-                    <a:pt x="2435165" y="876333"/>
-                  </a:lnTo>
-                  <a:lnTo>
-                    <a:pt x="2506788" y="894654"/>
-                  </a:lnTo>
-                  <a:lnTo>
-                    <a:pt x="2578410" y="912637"/>
-                  </a:lnTo>
-                  <a:lnTo>
-                    <a:pt x="2650033" y="930290"/>
-                  </a:lnTo>
-                  <a:lnTo>
-                    <a:pt x="2721655" y="947618"/>
-                  </a:lnTo>
-                  <a:lnTo>
-                    <a:pt x="2793278" y="964627"/>
-                  </a:lnTo>
-                  <a:lnTo>
-                    <a:pt x="2864901" y="981323"/>
-                  </a:lnTo>
-                  <a:lnTo>
-                    <a:pt x="2936523" y="997713"/>
-                  </a:lnTo>
-                  <a:lnTo>
-                    <a:pt x="3008146" y="1013801"/>
-                  </a:lnTo>
-                  <a:lnTo>
-                    <a:pt x="3079768" y="1029593"/>
-                  </a:lnTo>
-                  <a:lnTo>
-                    <a:pt x="3151391" y="1045094"/>
-                  </a:lnTo>
-                  <a:lnTo>
-                    <a:pt x="3223013" y="1060311"/>
-                  </a:lnTo>
-                  <a:lnTo>
-                    <a:pt x="3294636" y="1075248"/>
-                  </a:lnTo>
-                  <a:lnTo>
-                    <a:pt x="3366258" y="1089910"/>
-                  </a:lnTo>
-                  <a:lnTo>
-                    <a:pt x="3437881" y="1104302"/>
-                  </a:lnTo>
-                  <a:lnTo>
-                    <a:pt x="3509503" y="1118429"/>
-                  </a:lnTo>
-                  <a:lnTo>
-                    <a:pt x="3581126" y="1132297"/>
-                  </a:lnTo>
-                  <a:lnTo>
-                    <a:pt x="3652748" y="1145910"/>
-                  </a:lnTo>
-                  <a:lnTo>
-                    <a:pt x="3724371" y="1159272"/>
-                  </a:lnTo>
-                  <a:lnTo>
-                    <a:pt x="3795993" y="1172389"/>
-                  </a:lnTo>
-                  <a:lnTo>
-                    <a:pt x="3867616" y="1185264"/>
-                  </a:lnTo>
-                  <a:lnTo>
-                    <a:pt x="3939238" y="1197903"/>
-                  </a:lnTo>
-                  <a:lnTo>
-                    <a:pt x="4010861" y="1210309"/>
-                  </a:lnTo>
-                  <a:lnTo>
-                    <a:pt x="4082483" y="1222487"/>
-                  </a:lnTo>
-                  <a:lnTo>
-                    <a:pt x="4154106" y="1234441"/>
-                  </a:lnTo>
-                  <a:lnTo>
-                    <a:pt x="4225729" y="1246175"/>
-                  </a:lnTo>
-                  <a:lnTo>
-                    <a:pt x="4297351" y="1257693"/>
-                  </a:lnTo>
-                  <a:lnTo>
-                    <a:pt x="4368974" y="1269000"/>
-                  </a:lnTo>
-                  <a:lnTo>
-                    <a:pt x="4440596" y="1280098"/>
-                  </a:lnTo>
-                  <a:lnTo>
-                    <a:pt x="4512219" y="1290993"/>
-                  </a:lnTo>
-                  <a:lnTo>
-                    <a:pt x="4583841" y="1301687"/>
-                  </a:lnTo>
-                  <a:lnTo>
-                    <a:pt x="4655464" y="1312184"/>
-                  </a:lnTo>
-                  <a:lnTo>
-                    <a:pt x="4727086" y="1322489"/>
-                  </a:lnTo>
-                  <a:lnTo>
-                    <a:pt x="4798709" y="1332603"/>
-                  </a:lnTo>
-                  <a:lnTo>
-                    <a:pt x="4870331" y="1342532"/>
-                  </a:lnTo>
-                  <a:lnTo>
-                    <a:pt x="4941954" y="1352278"/>
-                  </a:lnTo>
-                  <a:lnTo>
-                    <a:pt x="5013576" y="1361845"/>
-                  </a:lnTo>
-                  <a:lnTo>
-                    <a:pt x="5085199" y="1371236"/>
-                  </a:lnTo>
-                  <a:lnTo>
-                    <a:pt x="5156821" y="1380455"/>
-                  </a:lnTo>
-                  <a:lnTo>
-                    <a:pt x="5228444" y="1389503"/>
-                  </a:lnTo>
-                  <a:lnTo>
-                    <a:pt x="5300066" y="1398386"/>
-                  </a:lnTo>
-                  <a:lnTo>
-                    <a:pt x="5371689" y="1407105"/>
-                  </a:lnTo>
-                  <a:lnTo>
-                    <a:pt x="5443311" y="1415663"/>
-                  </a:lnTo>
-                  <a:lnTo>
-                    <a:pt x="5514934" y="1424064"/>
-                  </a:lnTo>
-                  <a:lnTo>
-                    <a:pt x="5586557" y="1432311"/>
-                  </a:lnTo>
-                  <a:lnTo>
-                    <a:pt x="5658179" y="1440406"/>
-                  </a:lnTo>
-                  <a:lnTo>
-                    <a:pt x="5729802" y="1448352"/>
-                  </a:lnTo>
-                  <a:lnTo>
-                    <a:pt x="5801424" y="1456152"/>
-                  </a:lnTo>
-                  <a:lnTo>
-                    <a:pt x="5873047" y="1463809"/>
-                  </a:lnTo>
-                  <a:lnTo>
-                    <a:pt x="5944669" y="1471324"/>
-                  </a:lnTo>
-                  <a:lnTo>
-                    <a:pt x="6016292" y="1478702"/>
-                  </a:lnTo>
-                  <a:lnTo>
-                    <a:pt x="6087914" y="1485944"/>
-                  </a:lnTo>
-                  <a:lnTo>
-                    <a:pt x="6159537" y="1493052"/>
-                  </a:lnTo>
-                  <a:lnTo>
-                    <a:pt x="6231159" y="1500030"/>
-                  </a:lnTo>
-                  <a:lnTo>
-                    <a:pt x="6302782" y="1506880"/>
-                  </a:lnTo>
-                  <a:lnTo>
-                    <a:pt x="6374404" y="1513603"/>
-                  </a:lnTo>
-                  <a:lnTo>
-                    <a:pt x="6446027" y="1520203"/>
-                  </a:lnTo>
-                  <a:lnTo>
-                    <a:pt x="6517649" y="1526682"/>
-                  </a:lnTo>
-                  <a:lnTo>
-                    <a:pt x="6589272" y="1533041"/>
-                  </a:lnTo>
-                  <a:lnTo>
-                    <a:pt x="6660894" y="1539283"/>
-                  </a:lnTo>
-                  <a:lnTo>
-                    <a:pt x="6732517" y="1545411"/>
-                  </a:lnTo>
-                  <a:lnTo>
-                    <a:pt x="6804139" y="1551426"/>
-                  </a:lnTo>
-                  <a:lnTo>
-                    <a:pt x="6875762" y="1557330"/>
-                  </a:lnTo>
-                  <a:lnTo>
-                    <a:pt x="6947385" y="1563126"/>
-                  </a:lnTo>
-                  <a:lnTo>
-                    <a:pt x="7019007" y="1568815"/>
-                  </a:lnTo>
-                  <a:lnTo>
-                    <a:pt x="7090630" y="1574400"/>
+                    <a:pt x="71622" y="34692"/>
+                  </a:lnTo>
+                  <a:lnTo>
+                    <a:pt x="143245" y="68744"/>
+                  </a:lnTo>
+                  <a:lnTo>
+                    <a:pt x="214867" y="102168"/>
+                  </a:lnTo>
+                  <a:lnTo>
+                    <a:pt x="286490" y="134974"/>
+                  </a:lnTo>
+                  <a:lnTo>
+                    <a:pt x="358112" y="167175"/>
+                  </a:lnTo>
+                  <a:lnTo>
+                    <a:pt x="429735" y="198780"/>
+                  </a:lnTo>
+                  <a:lnTo>
+                    <a:pt x="501357" y="229803"/>
+                  </a:lnTo>
+                  <a:lnTo>
+                    <a:pt x="572980" y="260252"/>
+                  </a:lnTo>
+                  <a:lnTo>
+                    <a:pt x="644602" y="290139"/>
+                  </a:lnTo>
+                  <a:lnTo>
+                    <a:pt x="716225" y="319474"/>
+                  </a:lnTo>
+                  <a:lnTo>
+                    <a:pt x="787847" y="348268"/>
+                  </a:lnTo>
+                  <a:lnTo>
+                    <a:pt x="859470" y="376530"/>
+                  </a:lnTo>
+                  <a:lnTo>
+                    <a:pt x="931092" y="404270"/>
+                  </a:lnTo>
+                  <a:lnTo>
+                    <a:pt x="1002715" y="431497"/>
+                  </a:lnTo>
+                  <a:lnTo>
+                    <a:pt x="1074337" y="458222"/>
+                  </a:lnTo>
+                  <a:lnTo>
+                    <a:pt x="1145960" y="484454"/>
+                  </a:lnTo>
+                  <a:lnTo>
+                    <a:pt x="1217582" y="510201"/>
+                  </a:lnTo>
+                  <a:lnTo>
+                    <a:pt x="1289205" y="535472"/>
+                  </a:lnTo>
+                  <a:lnTo>
+                    <a:pt x="1360827" y="560277"/>
+                  </a:lnTo>
+                  <a:lnTo>
+                    <a:pt x="1432450" y="584624"/>
+                  </a:lnTo>
+                  <a:lnTo>
+                    <a:pt x="1504073" y="608522"/>
+                  </a:lnTo>
+                  <a:lnTo>
+                    <a:pt x="1575695" y="631978"/>
+                  </a:lnTo>
+                  <a:lnTo>
+                    <a:pt x="1647318" y="655001"/>
+                  </a:lnTo>
+                  <a:lnTo>
+                    <a:pt x="1718940" y="677599"/>
+                  </a:lnTo>
+                  <a:lnTo>
+                    <a:pt x="1790563" y="699779"/>
+                  </a:lnTo>
+                  <a:lnTo>
+                    <a:pt x="1862185" y="721550"/>
+                  </a:lnTo>
+                  <a:lnTo>
+                    <a:pt x="1933808" y="742919"/>
+                  </a:lnTo>
+                  <a:lnTo>
+                    <a:pt x="2005430" y="763894"/>
+                  </a:lnTo>
+                  <a:lnTo>
+                    <a:pt x="2077053" y="784481"/>
+                  </a:lnTo>
+                  <a:lnTo>
+                    <a:pt x="2148675" y="804688"/>
+                  </a:lnTo>
+                  <a:lnTo>
+                    <a:pt x="2220298" y="824521"/>
+                  </a:lnTo>
+                  <a:lnTo>
+                    <a:pt x="2291920" y="843989"/>
+                  </a:lnTo>
+                  <a:lnTo>
+                    <a:pt x="2363543" y="863097"/>
+                  </a:lnTo>
+                  <a:lnTo>
+                    <a:pt x="2435165" y="881852"/>
+                  </a:lnTo>
+                  <a:lnTo>
+                    <a:pt x="2506788" y="900261"/>
+                  </a:lnTo>
+                  <a:lnTo>
+                    <a:pt x="2578410" y="918330"/>
+                  </a:lnTo>
+                  <a:lnTo>
+                    <a:pt x="2650033" y="936065"/>
+                  </a:lnTo>
+                  <a:lnTo>
+                    <a:pt x="2721655" y="953473"/>
+                  </a:lnTo>
+                  <a:lnTo>
+                    <a:pt x="2793278" y="970560"/>
+                  </a:lnTo>
+                  <a:lnTo>
+                    <a:pt x="2864901" y="987330"/>
+                  </a:lnTo>
+                  <a:lnTo>
+                    <a:pt x="2936523" y="1003792"/>
+                  </a:lnTo>
+                  <a:lnTo>
+                    <a:pt x="3008146" y="1019949"/>
+                  </a:lnTo>
+                  <a:lnTo>
+                    <a:pt x="3079768" y="1035808"/>
+                  </a:lnTo>
+                  <a:lnTo>
+                    <a:pt x="3151391" y="1051374"/>
+                  </a:lnTo>
+                  <a:lnTo>
+                    <a:pt x="3223013" y="1066652"/>
+                  </a:lnTo>
+                  <a:lnTo>
+                    <a:pt x="3294636" y="1081649"/>
+                  </a:lnTo>
+                  <a:lnTo>
+                    <a:pt x="3366258" y="1096368"/>
+                  </a:lnTo>
+                  <a:lnTo>
+                    <a:pt x="3437881" y="1110816"/>
+                  </a:lnTo>
+                  <a:lnTo>
+                    <a:pt x="3509503" y="1124997"/>
+                  </a:lnTo>
+                  <a:lnTo>
+                    <a:pt x="3581126" y="1138916"/>
+                  </a:lnTo>
+                  <a:lnTo>
+                    <a:pt x="3652748" y="1152578"/>
+                  </a:lnTo>
+                  <a:lnTo>
+                    <a:pt x="3724371" y="1165988"/>
+                  </a:lnTo>
+                  <a:lnTo>
+                    <a:pt x="3795993" y="1179150"/>
+                  </a:lnTo>
+                  <a:lnTo>
+                    <a:pt x="3867616" y="1192069"/>
+                  </a:lnTo>
+                  <a:lnTo>
+                    <a:pt x="3939238" y="1204750"/>
+                  </a:lnTo>
+                  <a:lnTo>
+                    <a:pt x="4010861" y="1217196"/>
+                  </a:lnTo>
+                  <a:lnTo>
+                    <a:pt x="4082483" y="1229413"/>
+                  </a:lnTo>
+                  <a:lnTo>
+                    <a:pt x="4154106" y="1241404"/>
+                  </a:lnTo>
+                  <a:lnTo>
+                    <a:pt x="4225729" y="1253173"/>
+                  </a:lnTo>
+                  <a:lnTo>
+                    <a:pt x="4297351" y="1264726"/>
+                  </a:lnTo>
+                  <a:lnTo>
+                    <a:pt x="4368974" y="1276065"/>
+                  </a:lnTo>
+                  <a:lnTo>
+                    <a:pt x="4440596" y="1287194"/>
+                  </a:lnTo>
+                  <a:lnTo>
+                    <a:pt x="4512219" y="1298118"/>
+                  </a:lnTo>
+                  <a:lnTo>
+                    <a:pt x="4583841" y="1308840"/>
+                  </a:lnTo>
+                  <a:lnTo>
+                    <a:pt x="4655464" y="1319365"/>
+                  </a:lnTo>
+                  <a:lnTo>
+                    <a:pt x="4727086" y="1329695"/>
+                  </a:lnTo>
+                  <a:lnTo>
+                    <a:pt x="4798709" y="1339834"/>
+                  </a:lnTo>
+                  <a:lnTo>
+                    <a:pt x="4870331" y="1349786"/>
+                  </a:lnTo>
+                  <a:lnTo>
+                    <a:pt x="4941954" y="1359554"/>
+                  </a:lnTo>
+                  <a:lnTo>
+                    <a:pt x="5013576" y="1369142"/>
+                  </a:lnTo>
+                  <a:lnTo>
+                    <a:pt x="5085199" y="1378553"/>
+                  </a:lnTo>
+                  <a:lnTo>
+                    <a:pt x="5156821" y="1387790"/>
+                  </a:lnTo>
+                  <a:lnTo>
+                    <a:pt x="5228444" y="1396856"/>
+                  </a:lnTo>
+                  <a:lnTo>
+                    <a:pt x="5300066" y="1405756"/>
+                  </a:lnTo>
+                  <a:lnTo>
+                    <a:pt x="5371689" y="1414490"/>
+                  </a:lnTo>
+                  <a:lnTo>
+                    <a:pt x="5443311" y="1423064"/>
+                  </a:lnTo>
+                  <a:lnTo>
+                    <a:pt x="5514934" y="1431479"/>
+                  </a:lnTo>
+                  <a:lnTo>
+                    <a:pt x="5586557" y="1439739"/>
+                  </a:lnTo>
+                  <a:lnTo>
+                    <a:pt x="5658179" y="1447846"/>
+                  </a:lnTo>
+                  <a:lnTo>
+                    <a:pt x="5729802" y="1455803"/>
+                  </a:lnTo>
+                  <a:lnTo>
+                    <a:pt x="5801424" y="1463614"/>
+                  </a:lnTo>
+                  <a:lnTo>
+                    <a:pt x="5873047" y="1471280"/>
+                  </a:lnTo>
+                  <a:lnTo>
+                    <a:pt x="5944669" y="1478805"/>
+                  </a:lnTo>
+                  <a:lnTo>
+                    <a:pt x="6016292" y="1486191"/>
+                  </a:lnTo>
+                  <a:lnTo>
+                    <a:pt x="6087914" y="1493440"/>
+                  </a:lnTo>
+                  <a:lnTo>
+                    <a:pt x="6159537" y="1500556"/>
+                  </a:lnTo>
+                  <a:lnTo>
+                    <a:pt x="6231159" y="1507540"/>
+                  </a:lnTo>
+                  <a:lnTo>
+                    <a:pt x="6302782" y="1514395"/>
+                  </a:lnTo>
+                  <a:lnTo>
+                    <a:pt x="6374404" y="1521124"/>
+                  </a:lnTo>
+                  <a:lnTo>
+                    <a:pt x="6446027" y="1527728"/>
+                  </a:lnTo>
+                  <a:lnTo>
+                    <a:pt x="6517649" y="1534211"/>
+                  </a:lnTo>
+                  <a:lnTo>
+                    <a:pt x="6589272" y="1540573"/>
+                  </a:lnTo>
+                  <a:lnTo>
+                    <a:pt x="6660894" y="1546819"/>
+                  </a:lnTo>
+                  <a:lnTo>
+                    <a:pt x="6732517" y="1552949"/>
+                  </a:lnTo>
+                  <a:lnTo>
+                    <a:pt x="6804139" y="1558965"/>
+                  </a:lnTo>
+                  <a:lnTo>
+                    <a:pt x="6875762" y="1564871"/>
+                  </a:lnTo>
+                  <a:lnTo>
+                    <a:pt x="6947385" y="1570668"/>
+                  </a:lnTo>
+                  <a:lnTo>
+                    <a:pt x="7019007" y="1576357"/>
+                  </a:lnTo>
+                  <a:lnTo>
+                    <a:pt x="7090630" y="1581942"/>
                   </a:lnTo>
                 </a:path>
               </a:pathLst>
@@ -4660,7 +4660,7 @@
           </p:nvSpPr>
           <p:spPr>
             <a:xfrm>
-              <a:off x="4313661" y="2073503"/>
+              <a:off x="4313914" y="2073503"/>
               <a:ext cx="0" cy="3649639"/>
             </a:xfrm>
             <a:custGeom>
@@ -4933,7 +4933,7 @@
           </p:nvSpPr>
           <p:spPr>
             <a:xfrm>
-              <a:off x="2280620" y="5785772"/>
+              <a:off x="2281218" y="5785772"/>
               <a:ext cx="161574" cy="80101"/>
             </a:xfrm>
             <a:prstGeom prst="rect">
@@ -4979,7 +4979,7 @@
           </p:nvSpPr>
           <p:spPr>
             <a:xfrm>
-              <a:off x="4204872" y="5785772"/>
+              <a:off x="4203472" y="5785772"/>
               <a:ext cx="62179" cy="80101"/>
             </a:xfrm>
             <a:prstGeom prst="rect">
@@ -5025,7 +5025,7 @@
           </p:nvSpPr>
           <p:spPr>
             <a:xfrm>
-              <a:off x="6048338" y="5785772"/>
+              <a:off x="6044938" y="5785772"/>
               <a:ext cx="124358" cy="80101"/>
             </a:xfrm>
             <a:prstGeom prst="rect">
@@ -5071,7 +5071,7 @@
           </p:nvSpPr>
           <p:spPr>
             <a:xfrm>
-              <a:off x="7922893" y="5785772"/>
+              <a:off x="7917494" y="5785772"/>
               <a:ext cx="124358" cy="80101"/>
             </a:xfrm>
             <a:prstGeom prst="rect">
@@ -5242,7 +5242,7 @@
                   <a:latin typeface="Helvetica"/>
                   <a:cs typeface="Helvetica"/>
                 </a:rPr>
-                <a:t>subHR per 10 % decline: 1.27 (1.10-1.48), p_Bonf = 0.007 (n = 6)  |  per IQR decline (Δ = 25.8 %): 1.87 (1.28-2.74)  |  IQR: [-10.7, 15.1] %</a:t>
+                <a:t>subHR per 10 % decline: 1.28 (1.10-1.48), p_Bonf = 0.007 (n = 6)  |  per IQR decline (Δ = 25.8 %): 1.88 (1.28-2.74)  |  IQR: [-10.6, 15.2] %</a:t>
               </a:r>
             </a:p>
           </p:txBody>
